--- a/备选资产/结构图/时间轴与发展历程-001/example.pptx
+++ b/备选资产/结构图/时间轴与发展历程-001/example.pptx
@@ -2,13 +2,13 @@
 <file path=ppt/presentation.xml><?xml version="1.0" encoding="utf-8"?>
 <p:presentation xmlns:p="http://schemas.openxmlformats.org/presentationml/2006/main">
   <p:sldMasterIdLst>
-    <p:sldMasterId xmlns:r="http://schemas.openxmlformats.org/officeDocument/2006/relationships" id="2147483648" r:id="R1633279d12ee445c"/>
+    <p:sldMasterId xmlns:r="http://schemas.openxmlformats.org/officeDocument/2006/relationships" id="2147483648" r:id="R0b70c2cad4cc47fc"/>
   </p:sldMasterIdLst>
   <p:notesMasterIdLst>
-    <p:notesMasterId xmlns:r="http://schemas.openxmlformats.org/officeDocument/2006/relationships" r:id="R25bfec688d6349b4"/>
+    <p:notesMasterId xmlns:r="http://schemas.openxmlformats.org/officeDocument/2006/relationships" r:id="R6cf3cc822ca748ca"/>
   </p:notesMasterIdLst>
   <p:sldIdLst>
-    <p:sldId xmlns:r="http://schemas.openxmlformats.org/officeDocument/2006/relationships" id="256" r:id="R2ab883adba8c48e1"/>
+    <p:sldId xmlns:r="http://schemas.openxmlformats.org/officeDocument/2006/relationships" id="256" r:id="Rfaa8020e505c49b5"/>
   </p:sldIdLst>
   <p:sldSz cx="12192000" cy="6858000"/>
   <p:notesSz cx="6858000" cy="9144000"/>
@@ -506,7 +506,7 @@
   </p:cSld>
   <p:clrMap bg1="lt1" tx1="dk1" bg2="lt2" tx2="dk2" accent1="accent1" accent2="accent2" accent3="accent3" accent4="accent4" accent5="accent5" accent6="accent6" hlink="hlink" folHlink="folHlink"/>
   <p:sldLayoutIdLst>
-    <p:sldLayoutId xmlns:r="http://schemas.openxmlformats.org/officeDocument/2006/relationships" id="2147483649" r:id="R3c6e5649dd6748b9"/>
+    <p:sldLayoutId xmlns:r="http://schemas.openxmlformats.org/officeDocument/2006/relationships" id="2147483649" r:id="R2b317f70cd664e8a"/>
   </p:sldLayoutIdLst>
   <p:txStyles>
     <p:titleStyle>
@@ -1054,10 +1054,10 @@
       </p:grpSpPr>
       <p:sp>
         <p:nvSpPr>
-          <p:cNvPr id="26" name="">
+          <p:cNvPr id="30" name="">
             <a:extLst xmlns:a="http://schemas.openxmlformats.org/drawingml/2006/main">
               <a:ext uri="{FF2B5EF4-FFF2-40B4-BE49-F238E27FC236}">
-                <a16:creationId xmlns:a16="http://schemas.microsoft.com/office/drawing/2014/main" id="{C2B104BA-F3CB-4E0D-895A-B136020693DC}"/>
+                <a16:creationId xmlns:a16="http://schemas.microsoft.com/office/drawing/2014/main" id="{5C652B79-7B02-43D1-B324-B2E0045BF4C0}"/>
               </a:ext>
             </a:extLst>
           </p:cNvPr>
@@ -1115,7 +1115,7 @@
           <p:cNvPr id="2" name="">
             <a:extLst xmlns:a="http://schemas.openxmlformats.org/drawingml/2006/main">
               <a:ext uri="{FF2B5EF4-FFF2-40B4-BE49-F238E27FC236}">
-                <a16:creationId xmlns:a16="http://schemas.microsoft.com/office/drawing/2014/main" id="{4B317DEE-9194-4BA6-83CB-58A4165BFE08}"/>
+                <a16:creationId xmlns:a16="http://schemas.microsoft.com/office/drawing/2014/main" id="{9E884A6C-8069-499C-AEA2-BD9E4CD691C7}"/>
               </a:ext>
             </a:extLst>
           </p:cNvPr>
@@ -1163,7 +1163,7 @@
                 <a:ea typeface="Microsoft YaHei"/>
                 <a:cs typeface="Microsoft YaHei"/>
               </a:rPr>
-              <a:t>时间轴 / 路线图</a:t>
+              <a:t>阶段节点 · 发展历程</a:t>
             </a:r>
           </a:p>
         </p:txBody>
@@ -1173,7 +1173,7 @@
           <p:cNvPr id="3" name="">
             <a:extLst xmlns:a="http://schemas.openxmlformats.org/drawingml/2006/main">
               <a:ext uri="{FF2B5EF4-FFF2-40B4-BE49-F238E27FC236}">
-                <a16:creationId xmlns:a16="http://schemas.microsoft.com/office/drawing/2014/main" id="{7A63E04E-7C52-41CD-B092-A4072AF9D2AF}"/>
+                <a16:creationId xmlns:a16="http://schemas.microsoft.com/office/drawing/2014/main" id="{E3117DA8-0D1F-40A6-A1B8-E1DDA87C179A}"/>
               </a:ext>
             </a:extLst>
           </p:cNvPr>
@@ -1183,15 +1183,15 @@
           <p:nvPr/>
         </p:nvSpPr>
         <p:spPr>
-          <a:xfrm xmlns:a="http://schemas.openxmlformats.org/drawingml/2006/main" flipV="1">
-            <a:off x="857250" y="4429125"/>
-            <a:ext cx="3429000" cy="1000125"/>
+          <a:xfrm xmlns:a="http://schemas.openxmlformats.org/drawingml/2006/main">
+            <a:off x="609600" y="3209925"/>
+            <a:ext cx="10972800" cy="0"/>
           </a:xfrm>
           <a:prstGeom xmlns:a="http://schemas.openxmlformats.org/drawingml/2006/main" prst="line">
             <a:avLst/>
           </a:prstGeom>
           <a:noFill xmlns:a="http://schemas.openxmlformats.org/drawingml/2006/main"/>
-          <a:ln xmlns:a="http://schemas.openxmlformats.org/drawingml/2006/main" w="38100">
+          <a:ln xmlns:a="http://schemas.openxmlformats.org/drawingml/2006/main" w="28575">
             <a:solidFill>
               <a:srgbClr val="1677C8"/>
             </a:solidFill>
@@ -1204,7 +1204,7 @@
           <p:cNvPr id="4" name="">
             <a:extLst xmlns:a="http://schemas.openxmlformats.org/drawingml/2006/main">
               <a:ext uri="{FF2B5EF4-FFF2-40B4-BE49-F238E27FC236}">
-                <a16:creationId xmlns:a16="http://schemas.microsoft.com/office/drawing/2014/main" id="{A0148E4E-DD3B-40CB-8191-752764FBED40}"/>
+                <a16:creationId xmlns:a16="http://schemas.microsoft.com/office/drawing/2014/main" id="{DF173034-5618-44ED-A0C0-D1E3A6F0CFDE}"/>
               </a:ext>
             </a:extLst>
           </p:cNvPr>
@@ -1214,18 +1214,20 @@
           <p:nvPr/>
         </p:nvSpPr>
         <p:spPr>
-          <a:xfrm xmlns:a="http://schemas.openxmlformats.org/drawingml/2006/main" flipV="1">
-            <a:off x="4286250" y="3429000"/>
-            <a:ext cx="3429000" cy="1000125"/>
+          <a:xfrm xmlns:a="http://schemas.openxmlformats.org/drawingml/2006/main">
+            <a:off x="638175" y="1476375"/>
+            <a:ext cx="2686050" cy="4495800"/>
           </a:xfrm>
-          <a:prstGeom xmlns:a="http://schemas.openxmlformats.org/drawingml/2006/main" prst="line">
-            <a:avLst/>
-          </a:prstGeom>
-          <a:noFill xmlns:a="http://schemas.openxmlformats.org/drawingml/2006/main"/>
-          <a:ln xmlns:a="http://schemas.openxmlformats.org/drawingml/2006/main" w="38100">
-            <a:solidFill>
-              <a:srgbClr val="1677C8"/>
-            </a:solidFill>
+          <a:prstGeom xmlns:a="http://schemas.openxmlformats.org/drawingml/2006/main" prst="roundRect">
+            <a:avLst>
+              <a:gd name="adj" fmla="val 709"/>
+            </a:avLst>
+          </a:prstGeom>
+          <a:solidFill xmlns:a="http://schemas.openxmlformats.org/drawingml/2006/main">
+            <a:srgbClr val="F0F7FC"/>
+          </a:solidFill>
+          <a:ln xmlns:a="http://schemas.openxmlformats.org/drawingml/2006/main" w="0">
+            <a:noFill/>
             <a:prstDash val="solid"/>
           </a:ln>
         </p:spPr>
@@ -1235,7 +1237,7 @@
           <p:cNvPr id="5" name="">
             <a:extLst xmlns:a="http://schemas.openxmlformats.org/drawingml/2006/main">
               <a:ext uri="{FF2B5EF4-FFF2-40B4-BE49-F238E27FC236}">
-                <a16:creationId xmlns:a16="http://schemas.microsoft.com/office/drawing/2014/main" id="{AAA99A17-5F6D-4F88-B63A-FDF13B37D460}"/>
+                <a16:creationId xmlns:a16="http://schemas.microsoft.com/office/drawing/2014/main" id="{3E43AE86-E40D-4460-BAA1-AB68A7EE5966}"/>
               </a:ext>
             </a:extLst>
           </p:cNvPr>
@@ -1245,28 +1247,55 @@
           <p:nvPr/>
         </p:nvSpPr>
         <p:spPr>
-          <a:xfrm xmlns:a="http://schemas.openxmlformats.org/drawingml/2006/main" flipV="1">
-            <a:off x="7715250" y="2428875"/>
-            <a:ext cx="3429000" cy="1000125"/>
+          <a:xfrm xmlns:a="http://schemas.openxmlformats.org/drawingml/2006/main">
+            <a:off x="723900" y="1619250"/>
+            <a:ext cx="2514600" cy="1000125"/>
           </a:xfrm>
-          <a:prstGeom xmlns:a="http://schemas.openxmlformats.org/drawingml/2006/main" prst="line">
+          <a:prstGeom xmlns:a="http://schemas.openxmlformats.org/drawingml/2006/main" prst="rect">
             <a:avLst/>
           </a:prstGeom>
           <a:noFill xmlns:a="http://schemas.openxmlformats.org/drawingml/2006/main"/>
-          <a:ln xmlns:a="http://schemas.openxmlformats.org/drawingml/2006/main" w="38100">
-            <a:solidFill>
-              <a:srgbClr val="1677C8"/>
-            </a:solidFill>
+          <a:ln xmlns:a="http://schemas.openxmlformats.org/drawingml/2006/main" w="0">
+            <a:noFill/>
             <a:prstDash val="solid"/>
           </a:ln>
         </p:spPr>
+        <p:txBody>
+          <a:bodyPr xmlns:a="http://schemas.openxmlformats.org/drawingml/2006/main" lIns="0" tIns="0" rIns="0" bIns="0" anchor="ctr">
+            <a:normAutofit fontScale="100000"/>
+          </a:bodyPr>
+          <a:lstStyle xmlns:a="http://schemas.openxmlformats.org/drawingml/2006/main"/>
+          <a:p xmlns:a="http://schemas.openxmlformats.org/drawingml/2006/main">
+            <a:pPr algn="ctr">
+              <a:defRPr sz="4350" b="1">
+                <a:solidFill>
+                  <a:srgbClr val="AFC4D8"/>
+                </a:solidFill>
+                <a:latin typeface="Microsoft YaHei"/>
+                <a:ea typeface="Microsoft YaHei"/>
+                <a:cs typeface="Microsoft YaHei"/>
+              </a:defRPr>
+            </a:pPr>
+            <a:r>
+              <a:rPr sz="4350" b="1">
+                <a:solidFill>
+                  <a:srgbClr val="AFC4D8"/>
+                </a:solidFill>
+                <a:latin typeface="Microsoft YaHei"/>
+                <a:ea typeface="Microsoft YaHei"/>
+                <a:cs typeface="Microsoft YaHei"/>
+              </a:rPr>
+              <a:t>2025</a:t>
+            </a:r>
+          </a:p>
+        </p:txBody>
       </p:sp>
       <p:sp>
         <p:nvSpPr>
           <p:cNvPr id="6" name="">
             <a:extLst xmlns:a="http://schemas.openxmlformats.org/drawingml/2006/main">
               <a:ext uri="{FF2B5EF4-FFF2-40B4-BE49-F238E27FC236}">
-                <a16:creationId xmlns:a16="http://schemas.microsoft.com/office/drawing/2014/main" id="{DDD8F415-F47B-4B77-962D-0EF8ACB9D918}"/>
+                <a16:creationId xmlns:a16="http://schemas.microsoft.com/office/drawing/2014/main" id="{0BCF93B8-93F8-495E-BD3A-231942B87B3D}"/>
               </a:ext>
             </a:extLst>
           </p:cNvPr>
@@ -1277,8 +1306,66 @@
         </p:nvSpPr>
         <p:spPr>
           <a:xfrm xmlns:a="http://schemas.openxmlformats.org/drawingml/2006/main">
-            <a:off x="742950" y="5314950"/>
-            <a:ext cx="228600" cy="228600"/>
+            <a:off x="723900" y="2724150"/>
+            <a:ext cx="2514600" cy="247650"/>
+          </a:xfrm>
+          <a:prstGeom xmlns:a="http://schemas.openxmlformats.org/drawingml/2006/main" prst="rect">
+            <a:avLst/>
+          </a:prstGeom>
+          <a:noFill xmlns:a="http://schemas.openxmlformats.org/drawingml/2006/main"/>
+          <a:ln xmlns:a="http://schemas.openxmlformats.org/drawingml/2006/main" w="0">
+            <a:noFill/>
+            <a:prstDash val="solid"/>
+          </a:ln>
+        </p:spPr>
+        <p:txBody>
+          <a:bodyPr xmlns:a="http://schemas.openxmlformats.org/drawingml/2006/main" lIns="0" tIns="0" rIns="0" bIns="0" anchor="ctr">
+            <a:normAutofit fontScale="100000"/>
+          </a:bodyPr>
+          <a:lstStyle xmlns:a="http://schemas.openxmlformats.org/drawingml/2006/main"/>
+          <a:p xmlns:a="http://schemas.openxmlformats.org/drawingml/2006/main">
+            <a:pPr algn="ctr">
+              <a:defRPr sz="1200" b="1">
+                <a:solidFill>
+                  <a:srgbClr val="7C8A9A"/>
+                </a:solidFill>
+                <a:latin typeface="Microsoft YaHei"/>
+                <a:ea typeface="Microsoft YaHei"/>
+                <a:cs typeface="Microsoft YaHei"/>
+              </a:defRPr>
+            </a:pPr>
+            <a:r>
+              <a:rPr sz="1200" b="1">
+                <a:solidFill>
+                  <a:srgbClr val="7C8A9A"/>
+                </a:solidFill>
+                <a:latin typeface="Microsoft YaHei"/>
+                <a:ea typeface="Microsoft YaHei"/>
+                <a:cs typeface="Microsoft YaHei"/>
+              </a:rPr>
+              <a:t>阶段 01</a:t>
+            </a:r>
+          </a:p>
+        </p:txBody>
+      </p:sp>
+      <p:sp>
+        <p:nvSpPr>
+          <p:cNvPr id="7" name="">
+            <a:extLst xmlns:a="http://schemas.openxmlformats.org/drawingml/2006/main">
+              <a:ext uri="{FF2B5EF4-FFF2-40B4-BE49-F238E27FC236}">
+                <a16:creationId xmlns:a16="http://schemas.microsoft.com/office/drawing/2014/main" id="{3ADBCB64-09F3-4017-B0AF-FDF6C965A431}"/>
+              </a:ext>
+            </a:extLst>
+          </p:cNvPr>
+          <p:cNvSpPr>
+            <a:spLocks xmlns:a="http://schemas.openxmlformats.org/drawingml/2006/main" noGrp="1"/>
+          </p:cNvSpPr>
+          <p:nvPr/>
+        </p:nvSpPr>
+        <p:spPr>
+          <a:xfrm xmlns:a="http://schemas.openxmlformats.org/drawingml/2006/main">
+            <a:off x="1857375" y="3086100"/>
+            <a:ext cx="247650" cy="247650"/>
           </a:xfrm>
           <a:prstGeom xmlns:a="http://schemas.openxmlformats.org/drawingml/2006/main" prst="ellipse">
             <a:avLst/>
@@ -1293,41 +1380,6 @@
             <a:prstDash val="solid"/>
           </a:ln>
         </p:spPr>
-      </p:sp>
-      <p:sp>
-        <p:nvSpPr>
-          <p:cNvPr id="7" name="">
-            <a:extLst xmlns:a="http://schemas.openxmlformats.org/drawingml/2006/main">
-              <a:ext uri="{FF2B5EF4-FFF2-40B4-BE49-F238E27FC236}">
-                <a16:creationId xmlns:a16="http://schemas.microsoft.com/office/drawing/2014/main" id="{9C9860E2-4FE4-4A37-9DAC-0ED4B073632C}"/>
-              </a:ext>
-            </a:extLst>
-          </p:cNvPr>
-          <p:cNvSpPr>
-            <a:spLocks xmlns:a="http://schemas.openxmlformats.org/drawingml/2006/main" noGrp="1"/>
-          </p:cNvSpPr>
-          <p:nvPr/>
-        </p:nvSpPr>
-        <p:spPr>
-          <a:xfrm xmlns:a="http://schemas.openxmlformats.org/drawingml/2006/main">
-            <a:off x="323850" y="3238500"/>
-            <a:ext cx="2095500" cy="1714500"/>
-          </a:xfrm>
-          <a:prstGeom xmlns:a="http://schemas.openxmlformats.org/drawingml/2006/main" prst="roundRect">
-            <a:avLst>
-              <a:gd name="adj" fmla="val 6667"/>
-            </a:avLst>
-          </a:prstGeom>
-          <a:solidFill xmlns:a="http://schemas.openxmlformats.org/drawingml/2006/main">
-            <a:srgbClr val="FFFFFF"/>
-          </a:solidFill>
-          <a:ln xmlns:a="http://schemas.openxmlformats.org/drawingml/2006/main" w="9525">
-            <a:solidFill>
-              <a:srgbClr val="C9D5E3"/>
-            </a:solidFill>
-            <a:prstDash val="dash"/>
-          </a:ln>
-        </p:spPr>
         <p:style>
           <a:lnRef xmlns:a="http://schemas.openxmlformats.org/drawingml/2006/main" idx="0"/>
           <a:fillRef xmlns:a="http://schemas.openxmlformats.org/drawingml/2006/main" idx="0"/>
@@ -1340,7 +1392,7 @@
           <p:cNvPr id="8" name="">
             <a:extLst xmlns:a="http://schemas.openxmlformats.org/drawingml/2006/main">
               <a:ext uri="{FF2B5EF4-FFF2-40B4-BE49-F238E27FC236}">
-                <a16:creationId xmlns:a16="http://schemas.microsoft.com/office/drawing/2014/main" id="{68FDBAEE-24DA-42A6-BAB4-4E464D300DA5}"/>
+                <a16:creationId xmlns:a16="http://schemas.microsoft.com/office/drawing/2014/main" id="{01FA3B3F-EC9A-4FEB-B5D8-DD6758452E95}"/>
               </a:ext>
             </a:extLst>
           </p:cNvPr>
@@ -1351,8 +1403,8 @@
         </p:nvSpPr>
         <p:spPr>
           <a:xfrm xmlns:a="http://schemas.openxmlformats.org/drawingml/2006/main">
-            <a:off x="476250" y="3409950"/>
-            <a:ext cx="1790700" cy="266700"/>
+            <a:off x="723900" y="3581400"/>
+            <a:ext cx="2514600" cy="552450"/>
           </a:xfrm>
           <a:prstGeom xmlns:a="http://schemas.openxmlformats.org/drawingml/2006/main" prst="rect">
             <a:avLst/>
@@ -1369,10 +1421,68 @@
           </a:bodyPr>
           <a:lstStyle xmlns:a="http://schemas.openxmlformats.org/drawingml/2006/main"/>
           <a:p xmlns:a="http://schemas.openxmlformats.org/drawingml/2006/main">
-            <a:pPr algn="l">
+            <a:pPr algn="ctr">
+              <a:defRPr sz="1650" b="1">
+                <a:solidFill>
+                  <a:srgbClr val="1677C8"/>
+                </a:solidFill>
+                <a:latin typeface="Microsoft YaHei"/>
+                <a:ea typeface="Microsoft YaHei"/>
+                <a:cs typeface="Microsoft YaHei"/>
+              </a:defRPr>
+            </a:pPr>
+            <a:r>
+              <a:rPr sz="1650" b="1">
+                <a:solidFill>
+                  <a:srgbClr val="1677C8"/>
+                </a:solidFill>
+                <a:latin typeface="Microsoft YaHei"/>
+                <a:ea typeface="Microsoft YaHei"/>
+                <a:cs typeface="Microsoft YaHei"/>
+              </a:rPr>
+              <a:t>验证方向</a:t>
+            </a:r>
+          </a:p>
+        </p:txBody>
+      </p:sp>
+      <p:sp>
+        <p:nvSpPr>
+          <p:cNvPr id="9" name="">
+            <a:extLst xmlns:a="http://schemas.openxmlformats.org/drawingml/2006/main">
+              <a:ext uri="{FF2B5EF4-FFF2-40B4-BE49-F238E27FC236}">
+                <a16:creationId xmlns:a16="http://schemas.microsoft.com/office/drawing/2014/main" id="{B23F2F04-5CD7-4FCB-AF49-871110EC9162}"/>
+              </a:ext>
+            </a:extLst>
+          </p:cNvPr>
+          <p:cNvSpPr>
+            <a:spLocks xmlns:a="http://schemas.openxmlformats.org/drawingml/2006/main" noGrp="1"/>
+          </p:cNvSpPr>
+          <p:nvPr/>
+        </p:nvSpPr>
+        <p:spPr>
+          <a:xfrm xmlns:a="http://schemas.openxmlformats.org/drawingml/2006/main">
+            <a:off x="762000" y="4210050"/>
+            <a:ext cx="2438400" cy="990600"/>
+          </a:xfrm>
+          <a:prstGeom xmlns:a="http://schemas.openxmlformats.org/drawingml/2006/main" prst="rect">
+            <a:avLst/>
+          </a:prstGeom>
+          <a:noFill xmlns:a="http://schemas.openxmlformats.org/drawingml/2006/main"/>
+          <a:ln xmlns:a="http://schemas.openxmlformats.org/drawingml/2006/main" w="0">
+            <a:noFill/>
+            <a:prstDash val="solid"/>
+          </a:ln>
+        </p:spPr>
+        <p:txBody>
+          <a:bodyPr xmlns:a="http://schemas.openxmlformats.org/drawingml/2006/main" lIns="0" tIns="0" rIns="0" bIns="0" anchor="t">
+            <a:normAutofit fontScale="100000"/>
+          </a:bodyPr>
+          <a:lstStyle xmlns:a="http://schemas.openxmlformats.org/drawingml/2006/main"/>
+          <a:p xmlns:a="http://schemas.openxmlformats.org/drawingml/2006/main">
+            <a:pPr algn="ctr">
               <a:defRPr sz="1200" b="0">
                 <a:solidFill>
-                  <a:srgbClr val="7C8A9A"/>
+                  <a:srgbClr val="475569"/>
                 </a:solidFill>
                 <a:latin typeface="Microsoft YaHei"/>
                 <a:ea typeface="Microsoft YaHei"/>
@@ -1382,23 +1492,46 @@
             <a:r>
               <a:rPr sz="1200" b="0">
                 <a:solidFill>
-                  <a:srgbClr val="7C8A9A"/>
+                  <a:srgbClr val="475569"/>
                 </a:solidFill>
                 <a:latin typeface="Microsoft YaHei"/>
                 <a:ea typeface="Microsoft YaHei"/>
                 <a:cs typeface="Microsoft YaHei"/>
               </a:rPr>
-              <a:t>阶段一</a:t>
+              <a:t>用一个真实场景确认</a:t>
+            </a:r>
+          </a:p>
+          <a:p xmlns:a="http://schemas.openxmlformats.org/drawingml/2006/main">
+            <a:pPr algn="ctr">
+              <a:defRPr sz="1200" b="0">
+                <a:solidFill>
+                  <a:srgbClr val="475569"/>
+                </a:solidFill>
+                <a:latin typeface="Microsoft YaHei"/>
+                <a:ea typeface="Microsoft YaHei"/>
+                <a:cs typeface="Microsoft YaHei"/>
+              </a:defRPr>
+            </a:pPr>
+            <a:r>
+              <a:rPr sz="1200" b="0">
+                <a:solidFill>
+                  <a:srgbClr val="475569"/>
+                </a:solidFill>
+                <a:latin typeface="Microsoft YaHei"/>
+                <a:ea typeface="Microsoft YaHei"/>
+                <a:cs typeface="Microsoft YaHei"/>
+              </a:rPr>
+              <a:t>需求、边界与最小闭环</a:t>
             </a:r>
           </a:p>
         </p:txBody>
       </p:sp>
       <p:sp>
         <p:nvSpPr>
-          <p:cNvPr id="9" name="">
+          <p:cNvPr id="10" name="">
             <a:extLst xmlns:a="http://schemas.openxmlformats.org/drawingml/2006/main">
               <a:ext uri="{FF2B5EF4-FFF2-40B4-BE49-F238E27FC236}">
-                <a16:creationId xmlns:a16="http://schemas.microsoft.com/office/drawing/2014/main" id="{E0AFF763-29DF-4936-8FDA-BA67BBAB0779}"/>
+                <a16:creationId xmlns:a16="http://schemas.microsoft.com/office/drawing/2014/main" id="{B2B43E8E-A649-439B-8ABA-783743D49A77}"/>
               </a:ext>
             </a:extLst>
           </p:cNvPr>
@@ -1409,8 +1542,41 @@
         </p:nvSpPr>
         <p:spPr>
           <a:xfrm xmlns:a="http://schemas.openxmlformats.org/drawingml/2006/main">
-            <a:off x="476250" y="3714750"/>
-            <a:ext cx="1790700" cy="495300"/>
+            <a:off x="1752600" y="5391150"/>
+            <a:ext cx="457200" cy="47625"/>
+          </a:xfrm>
+          <a:prstGeom xmlns:a="http://schemas.openxmlformats.org/drawingml/2006/main" prst="roundRect">
+            <a:avLst>
+              <a:gd name="adj" fmla="val 50000"/>
+            </a:avLst>
+          </a:prstGeom>
+          <a:solidFill xmlns:a="http://schemas.openxmlformats.org/drawingml/2006/main">
+            <a:srgbClr val="DCEEFF"/>
+          </a:solidFill>
+          <a:ln xmlns:a="http://schemas.openxmlformats.org/drawingml/2006/main" w="0">
+            <a:noFill/>
+            <a:prstDash val="solid"/>
+          </a:ln>
+        </p:spPr>
+      </p:sp>
+      <p:sp>
+        <p:nvSpPr>
+          <p:cNvPr id="11" name="">
+            <a:extLst xmlns:a="http://schemas.openxmlformats.org/drawingml/2006/main">
+              <a:ext uri="{FF2B5EF4-FFF2-40B4-BE49-F238E27FC236}">
+                <a16:creationId xmlns:a16="http://schemas.microsoft.com/office/drawing/2014/main" id="{1D036166-6DBD-4E22-A36C-7659FE394CD9}"/>
+              </a:ext>
+            </a:extLst>
+          </p:cNvPr>
+          <p:cNvSpPr>
+            <a:spLocks xmlns:a="http://schemas.openxmlformats.org/drawingml/2006/main" noGrp="1"/>
+          </p:cNvSpPr>
+          <p:nvPr/>
+        </p:nvSpPr>
+        <p:spPr>
+          <a:xfrm xmlns:a="http://schemas.openxmlformats.org/drawingml/2006/main">
+            <a:off x="3467100" y="1619250"/>
+            <a:ext cx="2514600" cy="1000125"/>
           </a:xfrm>
           <a:prstGeom xmlns:a="http://schemas.openxmlformats.org/drawingml/2006/main" prst="rect">
             <a:avLst/>
@@ -1427,7 +1593,162 @@
           </a:bodyPr>
           <a:lstStyle xmlns:a="http://schemas.openxmlformats.org/drawingml/2006/main"/>
           <a:p xmlns:a="http://schemas.openxmlformats.org/drawingml/2006/main">
-            <a:pPr algn="l">
+            <a:pPr algn="ctr">
+              <a:defRPr sz="4350" b="1">
+                <a:solidFill>
+                  <a:srgbClr val="AFC4D8"/>
+                </a:solidFill>
+                <a:latin typeface="Microsoft YaHei"/>
+                <a:ea typeface="Microsoft YaHei"/>
+                <a:cs typeface="Microsoft YaHei"/>
+              </a:defRPr>
+            </a:pPr>
+            <a:r>
+              <a:rPr sz="4350" b="1">
+                <a:solidFill>
+                  <a:srgbClr val="AFC4D8"/>
+                </a:solidFill>
+                <a:latin typeface="Microsoft YaHei"/>
+                <a:ea typeface="Microsoft YaHei"/>
+                <a:cs typeface="Microsoft YaHei"/>
+              </a:rPr>
+              <a:t>2026</a:t>
+            </a:r>
+          </a:p>
+        </p:txBody>
+      </p:sp>
+      <p:sp>
+        <p:nvSpPr>
+          <p:cNvPr id="12" name="">
+            <a:extLst xmlns:a="http://schemas.openxmlformats.org/drawingml/2006/main">
+              <a:ext uri="{FF2B5EF4-FFF2-40B4-BE49-F238E27FC236}">
+                <a16:creationId xmlns:a16="http://schemas.microsoft.com/office/drawing/2014/main" id="{E195E5AD-CBCF-4C83-B0ED-C1189DB809B5}"/>
+              </a:ext>
+            </a:extLst>
+          </p:cNvPr>
+          <p:cNvSpPr>
+            <a:spLocks xmlns:a="http://schemas.openxmlformats.org/drawingml/2006/main" noGrp="1"/>
+          </p:cNvSpPr>
+          <p:nvPr/>
+        </p:nvSpPr>
+        <p:spPr>
+          <a:xfrm xmlns:a="http://schemas.openxmlformats.org/drawingml/2006/main">
+            <a:off x="3467100" y="2724150"/>
+            <a:ext cx="2514600" cy="247650"/>
+          </a:xfrm>
+          <a:prstGeom xmlns:a="http://schemas.openxmlformats.org/drawingml/2006/main" prst="rect">
+            <a:avLst/>
+          </a:prstGeom>
+          <a:noFill xmlns:a="http://schemas.openxmlformats.org/drawingml/2006/main"/>
+          <a:ln xmlns:a="http://schemas.openxmlformats.org/drawingml/2006/main" w="0">
+            <a:noFill/>
+            <a:prstDash val="solid"/>
+          </a:ln>
+        </p:spPr>
+        <p:txBody>
+          <a:bodyPr xmlns:a="http://schemas.openxmlformats.org/drawingml/2006/main" lIns="0" tIns="0" rIns="0" bIns="0" anchor="ctr">
+            <a:normAutofit fontScale="100000"/>
+          </a:bodyPr>
+          <a:lstStyle xmlns:a="http://schemas.openxmlformats.org/drawingml/2006/main"/>
+          <a:p xmlns:a="http://schemas.openxmlformats.org/drawingml/2006/main">
+            <a:pPr algn="ctr">
+              <a:defRPr sz="1200" b="1">
+                <a:solidFill>
+                  <a:srgbClr val="7C8A9A"/>
+                </a:solidFill>
+                <a:latin typeface="Microsoft YaHei"/>
+                <a:ea typeface="Microsoft YaHei"/>
+                <a:cs typeface="Microsoft YaHei"/>
+              </a:defRPr>
+            </a:pPr>
+            <a:r>
+              <a:rPr sz="1200" b="1">
+                <a:solidFill>
+                  <a:srgbClr val="7C8A9A"/>
+                </a:solidFill>
+                <a:latin typeface="Microsoft YaHei"/>
+                <a:ea typeface="Microsoft YaHei"/>
+                <a:cs typeface="Microsoft YaHei"/>
+              </a:rPr>
+              <a:t>阶段 02</a:t>
+            </a:r>
+          </a:p>
+        </p:txBody>
+      </p:sp>
+      <p:sp>
+        <p:nvSpPr>
+          <p:cNvPr id="13" name="">
+            <a:extLst xmlns:a="http://schemas.openxmlformats.org/drawingml/2006/main">
+              <a:ext uri="{FF2B5EF4-FFF2-40B4-BE49-F238E27FC236}">
+                <a16:creationId xmlns:a16="http://schemas.microsoft.com/office/drawing/2014/main" id="{250161EB-9FBA-4BD3-9645-646AC733D38A}"/>
+              </a:ext>
+            </a:extLst>
+          </p:cNvPr>
+          <p:cNvSpPr>
+            <a:spLocks xmlns:a="http://schemas.openxmlformats.org/drawingml/2006/main" noGrp="1"/>
+          </p:cNvSpPr>
+          <p:nvPr/>
+        </p:nvSpPr>
+        <p:spPr>
+          <a:xfrm xmlns:a="http://schemas.openxmlformats.org/drawingml/2006/main">
+            <a:off x="4600575" y="3086100"/>
+            <a:ext cx="247650" cy="247650"/>
+          </a:xfrm>
+          <a:prstGeom xmlns:a="http://schemas.openxmlformats.org/drawingml/2006/main" prst="ellipse">
+            <a:avLst/>
+          </a:prstGeom>
+          <a:solidFill xmlns:a="http://schemas.openxmlformats.org/drawingml/2006/main">
+            <a:srgbClr val="1677C8"/>
+          </a:solidFill>
+          <a:ln xmlns:a="http://schemas.openxmlformats.org/drawingml/2006/main" w="28575">
+            <a:solidFill>
+              <a:srgbClr val="FFFFFF"/>
+            </a:solidFill>
+            <a:prstDash val="solid"/>
+          </a:ln>
+        </p:spPr>
+        <p:style>
+          <a:lnRef xmlns:a="http://schemas.openxmlformats.org/drawingml/2006/main" idx="0"/>
+          <a:fillRef xmlns:a="http://schemas.openxmlformats.org/drawingml/2006/main" idx="0"/>
+          <a:effectRef xmlns:a="http://schemas.openxmlformats.org/drawingml/2006/main" idx="4"/>
+          <a:fontRef xmlns:a="http://schemas.openxmlformats.org/drawingml/2006/main" idx="major"/>
+        </p:style>
+      </p:sp>
+      <p:sp>
+        <p:nvSpPr>
+          <p:cNvPr id="14" name="">
+            <a:extLst xmlns:a="http://schemas.openxmlformats.org/drawingml/2006/main">
+              <a:ext uri="{FF2B5EF4-FFF2-40B4-BE49-F238E27FC236}">
+                <a16:creationId xmlns:a16="http://schemas.microsoft.com/office/drawing/2014/main" id="{BD7F1786-C48F-4000-9328-620F337E196C}"/>
+              </a:ext>
+            </a:extLst>
+          </p:cNvPr>
+          <p:cNvSpPr>
+            <a:spLocks xmlns:a="http://schemas.openxmlformats.org/drawingml/2006/main" noGrp="1"/>
+          </p:cNvSpPr>
+          <p:nvPr/>
+        </p:nvSpPr>
+        <p:spPr>
+          <a:xfrm xmlns:a="http://schemas.openxmlformats.org/drawingml/2006/main">
+            <a:off x="3467100" y="3581400"/>
+            <a:ext cx="2514600" cy="552450"/>
+          </a:xfrm>
+          <a:prstGeom xmlns:a="http://schemas.openxmlformats.org/drawingml/2006/main" prst="rect">
+            <a:avLst/>
+          </a:prstGeom>
+          <a:noFill xmlns:a="http://schemas.openxmlformats.org/drawingml/2006/main"/>
+          <a:ln xmlns:a="http://schemas.openxmlformats.org/drawingml/2006/main" w="0">
+            <a:noFill/>
+            <a:prstDash val="solid"/>
+          </a:ln>
+        </p:spPr>
+        <p:txBody>
+          <a:bodyPr xmlns:a="http://schemas.openxmlformats.org/drawingml/2006/main" lIns="0" tIns="0" rIns="0" bIns="0" anchor="ctr">
+            <a:normAutofit fontScale="100000"/>
+          </a:bodyPr>
+          <a:lstStyle xmlns:a="http://schemas.openxmlformats.org/drawingml/2006/main"/>
+          <a:p xmlns:a="http://schemas.openxmlformats.org/drawingml/2006/main">
+            <a:pPr algn="ctr">
               <a:defRPr sz="1650" b="1">
                 <a:solidFill>
                   <a:srgbClr val="1677C8"/>
@@ -1446,17 +1767,17 @@
                 <a:ea typeface="Microsoft YaHei"/>
                 <a:cs typeface="Microsoft YaHei"/>
               </a:rPr>
-              <a:t>起步</a:t>
+              <a:t>沉淀能力</a:t>
             </a:r>
           </a:p>
         </p:txBody>
       </p:sp>
       <p:sp>
         <p:nvSpPr>
-          <p:cNvPr id="10" name="">
+          <p:cNvPr id="15" name="">
             <a:extLst xmlns:a="http://schemas.openxmlformats.org/drawingml/2006/main">
               <a:ext uri="{FF2B5EF4-FFF2-40B4-BE49-F238E27FC236}">
-                <a16:creationId xmlns:a16="http://schemas.microsoft.com/office/drawing/2014/main" id="{EFAD6C4C-52D5-447D-8C27-EA294A53AF9C}"/>
+                <a16:creationId xmlns:a16="http://schemas.microsoft.com/office/drawing/2014/main" id="{C598C7E1-F295-4B56-B631-15842955A161}"/>
               </a:ext>
             </a:extLst>
           </p:cNvPr>
@@ -1467,8 +1788,8 @@
         </p:nvSpPr>
         <p:spPr>
           <a:xfrm xmlns:a="http://schemas.openxmlformats.org/drawingml/2006/main">
-            <a:off x="476250" y="4267200"/>
-            <a:ext cx="1790700" cy="514350"/>
+            <a:off x="3505200" y="4210050"/>
+            <a:ext cx="2438400" cy="990600"/>
           </a:xfrm>
           <a:prstGeom xmlns:a="http://schemas.openxmlformats.org/drawingml/2006/main" prst="rect">
             <a:avLst/>
@@ -1485,7 +1806,7 @@
           </a:bodyPr>
           <a:lstStyle xmlns:a="http://schemas.openxmlformats.org/drawingml/2006/main"/>
           <a:p xmlns:a="http://schemas.openxmlformats.org/drawingml/2006/main">
-            <a:pPr algn="l">
+            <a:pPr algn="ctr">
               <a:defRPr sz="1200" b="0">
                 <a:solidFill>
                   <a:srgbClr val="475569"/>
@@ -1504,17 +1825,40 @@
                 <a:ea typeface="Microsoft YaHei"/>
                 <a:cs typeface="Microsoft YaHei"/>
               </a:rPr>
-              <a:t>说明本阶段的重要事项</a:t>
+              <a:t>把稳定经验整理为</a:t>
+            </a:r>
+          </a:p>
+          <a:p xmlns:a="http://schemas.openxmlformats.org/drawingml/2006/main">
+            <a:pPr algn="ctr">
+              <a:defRPr sz="1200" b="0">
+                <a:solidFill>
+                  <a:srgbClr val="475569"/>
+                </a:solidFill>
+                <a:latin typeface="Microsoft YaHei"/>
+                <a:ea typeface="Microsoft YaHei"/>
+                <a:cs typeface="Microsoft YaHei"/>
+              </a:defRPr>
+            </a:pPr>
+            <a:r>
+              <a:rPr sz="1200" b="0">
+                <a:solidFill>
+                  <a:srgbClr val="475569"/>
+                </a:solidFill>
+                <a:latin typeface="Microsoft YaHei"/>
+                <a:ea typeface="Microsoft YaHei"/>
+                <a:cs typeface="Microsoft YaHei"/>
+              </a:rPr>
+              <a:t>规则、资产和可调用代码</a:t>
             </a:r>
           </a:p>
         </p:txBody>
       </p:sp>
       <p:sp>
         <p:nvSpPr>
-          <p:cNvPr id="11" name="">
+          <p:cNvPr id="16" name="">
             <a:extLst xmlns:a="http://schemas.openxmlformats.org/drawingml/2006/main">
               <a:ext uri="{FF2B5EF4-FFF2-40B4-BE49-F238E27FC236}">
-                <a16:creationId xmlns:a16="http://schemas.microsoft.com/office/drawing/2014/main" id="{1FDC2764-C693-41AB-82C6-EEE0DFF1F397}"/>
+                <a16:creationId xmlns:a16="http://schemas.microsoft.com/office/drawing/2014/main" id="{E0B1412E-E0A2-4FB2-9742-614899EED74B}"/>
               </a:ext>
             </a:extLst>
           </p:cNvPr>
@@ -1525,14 +1869,196 @@
         </p:nvSpPr>
         <p:spPr>
           <a:xfrm xmlns:a="http://schemas.openxmlformats.org/drawingml/2006/main">
-            <a:off x="4171950" y="4314825"/>
-            <a:ext cx="228600" cy="228600"/>
+            <a:off x="4495800" y="5391150"/>
+            <a:ext cx="457200" cy="47625"/>
+          </a:xfrm>
+          <a:prstGeom xmlns:a="http://schemas.openxmlformats.org/drawingml/2006/main" prst="roundRect">
+            <a:avLst>
+              <a:gd name="adj" fmla="val 50000"/>
+            </a:avLst>
+          </a:prstGeom>
+          <a:solidFill xmlns:a="http://schemas.openxmlformats.org/drawingml/2006/main">
+            <a:srgbClr val="DCEEFF"/>
+          </a:solidFill>
+          <a:ln xmlns:a="http://schemas.openxmlformats.org/drawingml/2006/main" w="0">
+            <a:noFill/>
+            <a:prstDash val="solid"/>
+          </a:ln>
+        </p:spPr>
+      </p:sp>
+      <p:sp>
+        <p:nvSpPr>
+          <p:cNvPr id="17" name="">
+            <a:extLst xmlns:a="http://schemas.openxmlformats.org/drawingml/2006/main">
+              <a:ext uri="{FF2B5EF4-FFF2-40B4-BE49-F238E27FC236}">
+                <a16:creationId xmlns:a16="http://schemas.microsoft.com/office/drawing/2014/main" id="{44153678-809D-4AEA-9305-5A6CBCBD86A5}"/>
+              </a:ext>
+            </a:extLst>
+          </p:cNvPr>
+          <p:cNvSpPr>
+            <a:spLocks xmlns:a="http://schemas.openxmlformats.org/drawingml/2006/main" noGrp="1"/>
+          </p:cNvSpPr>
+          <p:nvPr/>
+        </p:nvSpPr>
+        <p:spPr>
+          <a:xfrm xmlns:a="http://schemas.openxmlformats.org/drawingml/2006/main">
+            <a:off x="6124575" y="1476375"/>
+            <a:ext cx="2686050" cy="4495800"/>
+          </a:xfrm>
+          <a:prstGeom xmlns:a="http://schemas.openxmlformats.org/drawingml/2006/main" prst="roundRect">
+            <a:avLst>
+              <a:gd name="adj" fmla="val 709"/>
+            </a:avLst>
+          </a:prstGeom>
+          <a:solidFill xmlns:a="http://schemas.openxmlformats.org/drawingml/2006/main">
+            <a:srgbClr val="F0F7FC"/>
+          </a:solidFill>
+          <a:ln xmlns:a="http://schemas.openxmlformats.org/drawingml/2006/main" w="0">
+            <a:noFill/>
+            <a:prstDash val="solid"/>
+          </a:ln>
+        </p:spPr>
+      </p:sp>
+      <p:sp>
+        <p:nvSpPr>
+          <p:cNvPr id="18" name="">
+            <a:extLst xmlns:a="http://schemas.openxmlformats.org/drawingml/2006/main">
+              <a:ext uri="{FF2B5EF4-FFF2-40B4-BE49-F238E27FC236}">
+                <a16:creationId xmlns:a16="http://schemas.microsoft.com/office/drawing/2014/main" id="{0C56E508-E6F0-4362-80E1-A2A6D88F29A4}"/>
+              </a:ext>
+            </a:extLst>
+          </p:cNvPr>
+          <p:cNvSpPr>
+            <a:spLocks xmlns:a="http://schemas.openxmlformats.org/drawingml/2006/main" noGrp="1"/>
+          </p:cNvSpPr>
+          <p:nvPr/>
+        </p:nvSpPr>
+        <p:spPr>
+          <a:xfrm xmlns:a="http://schemas.openxmlformats.org/drawingml/2006/main">
+            <a:off x="6210300" y="1619250"/>
+            <a:ext cx="2514600" cy="1000125"/>
+          </a:xfrm>
+          <a:prstGeom xmlns:a="http://schemas.openxmlformats.org/drawingml/2006/main" prst="rect">
+            <a:avLst/>
+          </a:prstGeom>
+          <a:noFill xmlns:a="http://schemas.openxmlformats.org/drawingml/2006/main"/>
+          <a:ln xmlns:a="http://schemas.openxmlformats.org/drawingml/2006/main" w="0">
+            <a:noFill/>
+            <a:prstDash val="solid"/>
+          </a:ln>
+        </p:spPr>
+        <p:txBody>
+          <a:bodyPr xmlns:a="http://schemas.openxmlformats.org/drawingml/2006/main" lIns="0" tIns="0" rIns="0" bIns="0" anchor="ctr">
+            <a:normAutofit fontScale="100000"/>
+          </a:bodyPr>
+          <a:lstStyle xmlns:a="http://schemas.openxmlformats.org/drawingml/2006/main"/>
+          <a:p xmlns:a="http://schemas.openxmlformats.org/drawingml/2006/main">
+            <a:pPr algn="ctr">
+              <a:defRPr sz="4350" b="1">
+                <a:solidFill>
+                  <a:srgbClr val="AFC4D8"/>
+                </a:solidFill>
+                <a:latin typeface="Microsoft YaHei"/>
+                <a:ea typeface="Microsoft YaHei"/>
+                <a:cs typeface="Microsoft YaHei"/>
+              </a:defRPr>
+            </a:pPr>
+            <a:r>
+              <a:rPr sz="4350" b="1">
+                <a:solidFill>
+                  <a:srgbClr val="AFC4D8"/>
+                </a:solidFill>
+                <a:latin typeface="Microsoft YaHei"/>
+                <a:ea typeface="Microsoft YaHei"/>
+                <a:cs typeface="Microsoft YaHei"/>
+              </a:rPr>
+              <a:t>2027</a:t>
+            </a:r>
+          </a:p>
+        </p:txBody>
+      </p:sp>
+      <p:sp>
+        <p:nvSpPr>
+          <p:cNvPr id="19" name="">
+            <a:extLst xmlns:a="http://schemas.openxmlformats.org/drawingml/2006/main">
+              <a:ext uri="{FF2B5EF4-FFF2-40B4-BE49-F238E27FC236}">
+                <a16:creationId xmlns:a16="http://schemas.microsoft.com/office/drawing/2014/main" id="{F0FC94C6-F43E-4A2B-9115-D78DB7616D46}"/>
+              </a:ext>
+            </a:extLst>
+          </p:cNvPr>
+          <p:cNvSpPr>
+            <a:spLocks xmlns:a="http://schemas.openxmlformats.org/drawingml/2006/main" noGrp="1"/>
+          </p:cNvSpPr>
+          <p:nvPr/>
+        </p:nvSpPr>
+        <p:spPr>
+          <a:xfrm xmlns:a="http://schemas.openxmlformats.org/drawingml/2006/main">
+            <a:off x="6210300" y="2724150"/>
+            <a:ext cx="2514600" cy="247650"/>
+          </a:xfrm>
+          <a:prstGeom xmlns:a="http://schemas.openxmlformats.org/drawingml/2006/main" prst="rect">
+            <a:avLst/>
+          </a:prstGeom>
+          <a:noFill xmlns:a="http://schemas.openxmlformats.org/drawingml/2006/main"/>
+          <a:ln xmlns:a="http://schemas.openxmlformats.org/drawingml/2006/main" w="0">
+            <a:noFill/>
+            <a:prstDash val="solid"/>
+          </a:ln>
+        </p:spPr>
+        <p:txBody>
+          <a:bodyPr xmlns:a="http://schemas.openxmlformats.org/drawingml/2006/main" lIns="0" tIns="0" rIns="0" bIns="0" anchor="ctr">
+            <a:normAutofit fontScale="100000"/>
+          </a:bodyPr>
+          <a:lstStyle xmlns:a="http://schemas.openxmlformats.org/drawingml/2006/main"/>
+          <a:p xmlns:a="http://schemas.openxmlformats.org/drawingml/2006/main">
+            <a:pPr algn="ctr">
+              <a:defRPr sz="1200" b="1">
+                <a:solidFill>
+                  <a:srgbClr val="7C8A9A"/>
+                </a:solidFill>
+                <a:latin typeface="Microsoft YaHei"/>
+                <a:ea typeface="Microsoft YaHei"/>
+                <a:cs typeface="Microsoft YaHei"/>
+              </a:defRPr>
+            </a:pPr>
+            <a:r>
+              <a:rPr sz="1200" b="1">
+                <a:solidFill>
+                  <a:srgbClr val="7C8A9A"/>
+                </a:solidFill>
+                <a:latin typeface="Microsoft YaHei"/>
+                <a:ea typeface="Microsoft YaHei"/>
+                <a:cs typeface="Microsoft YaHei"/>
+              </a:rPr>
+              <a:t>阶段 03</a:t>
+            </a:r>
+          </a:p>
+        </p:txBody>
+      </p:sp>
+      <p:sp>
+        <p:nvSpPr>
+          <p:cNvPr id="20" name="">
+            <a:extLst xmlns:a="http://schemas.openxmlformats.org/drawingml/2006/main">
+              <a:ext uri="{FF2B5EF4-FFF2-40B4-BE49-F238E27FC236}">
+                <a16:creationId xmlns:a16="http://schemas.microsoft.com/office/drawing/2014/main" id="{A6FD9B31-1E5A-4B0C-87E9-FEA558680791}"/>
+              </a:ext>
+            </a:extLst>
+          </p:cNvPr>
+          <p:cNvSpPr>
+            <a:spLocks xmlns:a="http://schemas.openxmlformats.org/drawingml/2006/main" noGrp="1"/>
+          </p:cNvSpPr>
+          <p:nvPr/>
+        </p:nvSpPr>
+        <p:spPr>
+          <a:xfrm xmlns:a="http://schemas.openxmlformats.org/drawingml/2006/main">
+            <a:off x="7343775" y="3086100"/>
+            <a:ext cx="247650" cy="247650"/>
           </a:xfrm>
           <a:prstGeom xmlns:a="http://schemas.openxmlformats.org/drawingml/2006/main" prst="ellipse">
             <a:avLst/>
           </a:prstGeom>
           <a:solidFill xmlns:a="http://schemas.openxmlformats.org/drawingml/2006/main">
-            <a:srgbClr val="00A8D8"/>
+            <a:srgbClr val="1677C8"/>
           </a:solidFill>
           <a:ln xmlns:a="http://schemas.openxmlformats.org/drawingml/2006/main" w="28575">
             <a:solidFill>
@@ -1541,41 +2067,6 @@
             <a:prstDash val="solid"/>
           </a:ln>
         </p:spPr>
-      </p:sp>
-      <p:sp>
-        <p:nvSpPr>
-          <p:cNvPr id="12" name="">
-            <a:extLst xmlns:a="http://schemas.openxmlformats.org/drawingml/2006/main">
-              <a:ext uri="{FF2B5EF4-FFF2-40B4-BE49-F238E27FC236}">
-                <a16:creationId xmlns:a16="http://schemas.microsoft.com/office/drawing/2014/main" id="{CAB73037-33D3-4FEB-A57C-D49EFB9D477C}"/>
-              </a:ext>
-            </a:extLst>
-          </p:cNvPr>
-          <p:cNvSpPr>
-            <a:spLocks xmlns:a="http://schemas.openxmlformats.org/drawingml/2006/main" noGrp="1"/>
-          </p:cNvSpPr>
-          <p:nvPr/>
-        </p:nvSpPr>
-        <p:spPr>
-          <a:xfrm xmlns:a="http://schemas.openxmlformats.org/drawingml/2006/main">
-            <a:off x="3238500" y="2238375"/>
-            <a:ext cx="2095500" cy="1714500"/>
-          </a:xfrm>
-          <a:prstGeom xmlns:a="http://schemas.openxmlformats.org/drawingml/2006/main" prst="roundRect">
-            <a:avLst>
-              <a:gd name="adj" fmla="val 6667"/>
-            </a:avLst>
-          </a:prstGeom>
-          <a:solidFill xmlns:a="http://schemas.openxmlformats.org/drawingml/2006/main">
-            <a:srgbClr val="FFFFFF"/>
-          </a:solidFill>
-          <a:ln xmlns:a="http://schemas.openxmlformats.org/drawingml/2006/main" w="9525">
-            <a:solidFill>
-              <a:srgbClr val="C9D5E3"/>
-            </a:solidFill>
-            <a:prstDash val="dash"/>
-          </a:ln>
-        </p:spPr>
         <p:style>
           <a:lnRef xmlns:a="http://schemas.openxmlformats.org/drawingml/2006/main" idx="0"/>
           <a:fillRef xmlns:a="http://schemas.openxmlformats.org/drawingml/2006/main" idx="0"/>
@@ -1585,10 +2076,10 @@
       </p:sp>
       <p:sp>
         <p:nvSpPr>
-          <p:cNvPr id="13" name="">
+          <p:cNvPr id="21" name="">
             <a:extLst xmlns:a="http://schemas.openxmlformats.org/drawingml/2006/main">
               <a:ext uri="{FF2B5EF4-FFF2-40B4-BE49-F238E27FC236}">
-                <a16:creationId xmlns:a16="http://schemas.microsoft.com/office/drawing/2014/main" id="{EB89B2CF-0BCE-4D3C-B8F0-F3CD321442FE}"/>
+                <a16:creationId xmlns:a16="http://schemas.microsoft.com/office/drawing/2014/main" id="{6DDD36A5-5DB5-435A-8DE7-7D7CFE41CB1F}"/>
               </a:ext>
             </a:extLst>
           </p:cNvPr>
@@ -1599,8 +2090,8 @@
         </p:nvSpPr>
         <p:spPr>
           <a:xfrm xmlns:a="http://schemas.openxmlformats.org/drawingml/2006/main">
-            <a:off x="3390900" y="2409825"/>
-            <a:ext cx="1790700" cy="266700"/>
+            <a:off x="6210300" y="3581400"/>
+            <a:ext cx="2514600" cy="552450"/>
           </a:xfrm>
           <a:prstGeom xmlns:a="http://schemas.openxmlformats.org/drawingml/2006/main" prst="rect">
             <a:avLst/>
@@ -1617,10 +2108,68 @@
           </a:bodyPr>
           <a:lstStyle xmlns:a="http://schemas.openxmlformats.org/drawingml/2006/main"/>
           <a:p xmlns:a="http://schemas.openxmlformats.org/drawingml/2006/main">
-            <a:pPr algn="l">
+            <a:pPr algn="ctr">
+              <a:defRPr sz="1650" b="1">
+                <a:solidFill>
+                  <a:srgbClr val="1677C8"/>
+                </a:solidFill>
+                <a:latin typeface="Microsoft YaHei"/>
+                <a:ea typeface="Microsoft YaHei"/>
+                <a:cs typeface="Microsoft YaHei"/>
+              </a:defRPr>
+            </a:pPr>
+            <a:r>
+              <a:rPr sz="1650" b="1">
+                <a:solidFill>
+                  <a:srgbClr val="1677C8"/>
+                </a:solidFill>
+                <a:latin typeface="Microsoft YaHei"/>
+                <a:ea typeface="Microsoft YaHei"/>
+                <a:cs typeface="Microsoft YaHei"/>
+              </a:rPr>
+              <a:t>扩展场景</a:t>
+            </a:r>
+          </a:p>
+        </p:txBody>
+      </p:sp>
+      <p:sp>
+        <p:nvSpPr>
+          <p:cNvPr id="22" name="">
+            <a:extLst xmlns:a="http://schemas.openxmlformats.org/drawingml/2006/main">
+              <a:ext uri="{FF2B5EF4-FFF2-40B4-BE49-F238E27FC236}">
+                <a16:creationId xmlns:a16="http://schemas.microsoft.com/office/drawing/2014/main" id="{C87875A4-15A0-408D-BDA1-5919D10A999B}"/>
+              </a:ext>
+            </a:extLst>
+          </p:cNvPr>
+          <p:cNvSpPr>
+            <a:spLocks xmlns:a="http://schemas.openxmlformats.org/drawingml/2006/main" noGrp="1"/>
+          </p:cNvSpPr>
+          <p:nvPr/>
+        </p:nvSpPr>
+        <p:spPr>
+          <a:xfrm xmlns:a="http://schemas.openxmlformats.org/drawingml/2006/main">
+            <a:off x="6248400" y="4210050"/>
+            <a:ext cx="2438400" cy="990600"/>
+          </a:xfrm>
+          <a:prstGeom xmlns:a="http://schemas.openxmlformats.org/drawingml/2006/main" prst="rect">
+            <a:avLst/>
+          </a:prstGeom>
+          <a:noFill xmlns:a="http://schemas.openxmlformats.org/drawingml/2006/main"/>
+          <a:ln xmlns:a="http://schemas.openxmlformats.org/drawingml/2006/main" w="0">
+            <a:noFill/>
+            <a:prstDash val="solid"/>
+          </a:ln>
+        </p:spPr>
+        <p:txBody>
+          <a:bodyPr xmlns:a="http://schemas.openxmlformats.org/drawingml/2006/main" lIns="0" tIns="0" rIns="0" bIns="0" anchor="t">
+            <a:normAutofit fontScale="100000"/>
+          </a:bodyPr>
+          <a:lstStyle xmlns:a="http://schemas.openxmlformats.org/drawingml/2006/main"/>
+          <a:p xmlns:a="http://schemas.openxmlformats.org/drawingml/2006/main">
+            <a:pPr algn="ctr">
               <a:defRPr sz="1200" b="0">
                 <a:solidFill>
-                  <a:srgbClr val="7C8A9A"/>
+                  <a:srgbClr val="475569"/>
                 </a:solidFill>
                 <a:latin typeface="Microsoft YaHei"/>
                 <a:ea typeface="Microsoft YaHei"/>
@@ -1630,23 +2179,46 @@
             <a:r>
               <a:rPr sz="1200" b="0">
                 <a:solidFill>
-                  <a:srgbClr val="7C8A9A"/>
+                  <a:srgbClr val="475569"/>
                 </a:solidFill>
                 <a:latin typeface="Microsoft YaHei"/>
                 <a:ea typeface="Microsoft YaHei"/>
                 <a:cs typeface="Microsoft YaHei"/>
               </a:rPr>
-              <a:t>阶段二</a:t>
+              <a:t>在统一内核上逐步</a:t>
+            </a:r>
+          </a:p>
+          <a:p xmlns:a="http://schemas.openxmlformats.org/drawingml/2006/main">
+            <a:pPr algn="ctr">
+              <a:defRPr sz="1200" b="0">
+                <a:solidFill>
+                  <a:srgbClr val="475569"/>
+                </a:solidFill>
+                <a:latin typeface="Microsoft YaHei"/>
+                <a:ea typeface="Microsoft YaHei"/>
+                <a:cs typeface="Microsoft YaHei"/>
+              </a:defRPr>
+            </a:pPr>
+            <a:r>
+              <a:rPr sz="1200" b="0">
+                <a:solidFill>
+                  <a:srgbClr val="475569"/>
+                </a:solidFill>
+                <a:latin typeface="Microsoft YaHei"/>
+                <a:ea typeface="Microsoft YaHei"/>
+                <a:cs typeface="Microsoft YaHei"/>
+              </a:rPr>
+              <a:t>适配更多组织和用途</a:t>
             </a:r>
           </a:p>
         </p:txBody>
       </p:sp>
       <p:sp>
         <p:nvSpPr>
-          <p:cNvPr id="14" name="">
+          <p:cNvPr id="23" name="">
             <a:extLst xmlns:a="http://schemas.openxmlformats.org/drawingml/2006/main">
               <a:ext uri="{FF2B5EF4-FFF2-40B4-BE49-F238E27FC236}">
-                <a16:creationId xmlns:a16="http://schemas.microsoft.com/office/drawing/2014/main" id="{4FC6BE71-C042-4172-A626-B1317E7BCF69}"/>
+                <a16:creationId xmlns:a16="http://schemas.microsoft.com/office/drawing/2014/main" id="{44EAF058-98B7-4AAD-9F7E-6D3BDC07AB0D}"/>
               </a:ext>
             </a:extLst>
           </p:cNvPr>
@@ -1657,8 +2229,41 @@
         </p:nvSpPr>
         <p:spPr>
           <a:xfrm xmlns:a="http://schemas.openxmlformats.org/drawingml/2006/main">
-            <a:off x="3390900" y="2714625"/>
-            <a:ext cx="1790700" cy="495300"/>
+            <a:off x="7239000" y="5391150"/>
+            <a:ext cx="457200" cy="47625"/>
+          </a:xfrm>
+          <a:prstGeom xmlns:a="http://schemas.openxmlformats.org/drawingml/2006/main" prst="roundRect">
+            <a:avLst>
+              <a:gd name="adj" fmla="val 50000"/>
+            </a:avLst>
+          </a:prstGeom>
+          <a:solidFill xmlns:a="http://schemas.openxmlformats.org/drawingml/2006/main">
+            <a:srgbClr val="DCEEFF"/>
+          </a:solidFill>
+          <a:ln xmlns:a="http://schemas.openxmlformats.org/drawingml/2006/main" w="0">
+            <a:noFill/>
+            <a:prstDash val="solid"/>
+          </a:ln>
+        </p:spPr>
+      </p:sp>
+      <p:sp>
+        <p:nvSpPr>
+          <p:cNvPr id="24" name="">
+            <a:extLst xmlns:a="http://schemas.openxmlformats.org/drawingml/2006/main">
+              <a:ext uri="{FF2B5EF4-FFF2-40B4-BE49-F238E27FC236}">
+                <a16:creationId xmlns:a16="http://schemas.microsoft.com/office/drawing/2014/main" id="{11531F1F-E88F-45D8-8047-BDC471D7D0AA}"/>
+              </a:ext>
+            </a:extLst>
+          </p:cNvPr>
+          <p:cNvSpPr>
+            <a:spLocks xmlns:a="http://schemas.openxmlformats.org/drawingml/2006/main" noGrp="1"/>
+          </p:cNvSpPr>
+          <p:nvPr/>
+        </p:nvSpPr>
+        <p:spPr>
+          <a:xfrm xmlns:a="http://schemas.openxmlformats.org/drawingml/2006/main">
+            <a:off x="8953500" y="1619250"/>
+            <a:ext cx="2514600" cy="1000125"/>
           </a:xfrm>
           <a:prstGeom xmlns:a="http://schemas.openxmlformats.org/drawingml/2006/main" prst="rect">
             <a:avLst/>
@@ -1675,7 +2280,162 @@
           </a:bodyPr>
           <a:lstStyle xmlns:a="http://schemas.openxmlformats.org/drawingml/2006/main"/>
           <a:p xmlns:a="http://schemas.openxmlformats.org/drawingml/2006/main">
-            <a:pPr algn="l">
+            <a:pPr algn="ctr">
+              <a:defRPr sz="4350" b="1">
+                <a:solidFill>
+                  <a:srgbClr val="1677C8"/>
+                </a:solidFill>
+                <a:latin typeface="Microsoft YaHei"/>
+                <a:ea typeface="Microsoft YaHei"/>
+                <a:cs typeface="Microsoft YaHei"/>
+              </a:defRPr>
+            </a:pPr>
+            <a:r>
+              <a:rPr sz="4350" b="1">
+                <a:solidFill>
+                  <a:srgbClr val="1677C8"/>
+                </a:solidFill>
+                <a:latin typeface="Microsoft YaHei"/>
+                <a:ea typeface="Microsoft YaHei"/>
+                <a:cs typeface="Microsoft YaHei"/>
+              </a:rPr>
+              <a:t>2028</a:t>
+            </a:r>
+          </a:p>
+        </p:txBody>
+      </p:sp>
+      <p:sp>
+        <p:nvSpPr>
+          <p:cNvPr id="25" name="">
+            <a:extLst xmlns:a="http://schemas.openxmlformats.org/drawingml/2006/main">
+              <a:ext uri="{FF2B5EF4-FFF2-40B4-BE49-F238E27FC236}">
+                <a16:creationId xmlns:a16="http://schemas.microsoft.com/office/drawing/2014/main" id="{96C19A42-17C1-4ED4-878F-F442E25F245F}"/>
+              </a:ext>
+            </a:extLst>
+          </p:cNvPr>
+          <p:cNvSpPr>
+            <a:spLocks xmlns:a="http://schemas.openxmlformats.org/drawingml/2006/main" noGrp="1"/>
+          </p:cNvSpPr>
+          <p:nvPr/>
+        </p:nvSpPr>
+        <p:spPr>
+          <a:xfrm xmlns:a="http://schemas.openxmlformats.org/drawingml/2006/main">
+            <a:off x="8953500" y="2724150"/>
+            <a:ext cx="2514600" cy="247650"/>
+          </a:xfrm>
+          <a:prstGeom xmlns:a="http://schemas.openxmlformats.org/drawingml/2006/main" prst="rect">
+            <a:avLst/>
+          </a:prstGeom>
+          <a:noFill xmlns:a="http://schemas.openxmlformats.org/drawingml/2006/main"/>
+          <a:ln xmlns:a="http://schemas.openxmlformats.org/drawingml/2006/main" w="0">
+            <a:noFill/>
+            <a:prstDash val="solid"/>
+          </a:ln>
+        </p:spPr>
+        <p:txBody>
+          <a:bodyPr xmlns:a="http://schemas.openxmlformats.org/drawingml/2006/main" lIns="0" tIns="0" rIns="0" bIns="0" anchor="ctr">
+            <a:normAutofit fontScale="100000"/>
+          </a:bodyPr>
+          <a:lstStyle xmlns:a="http://schemas.openxmlformats.org/drawingml/2006/main"/>
+          <a:p xmlns:a="http://schemas.openxmlformats.org/drawingml/2006/main">
+            <a:pPr algn="ctr">
+              <a:defRPr sz="1200" b="1">
+                <a:solidFill>
+                  <a:srgbClr val="00A8D8"/>
+                </a:solidFill>
+                <a:latin typeface="Microsoft YaHei"/>
+                <a:ea typeface="Microsoft YaHei"/>
+                <a:cs typeface="Microsoft YaHei"/>
+              </a:defRPr>
+            </a:pPr>
+            <a:r>
+              <a:rPr sz="1200" b="1">
+                <a:solidFill>
+                  <a:srgbClr val="00A8D8"/>
+                </a:solidFill>
+                <a:latin typeface="Microsoft YaHei"/>
+                <a:ea typeface="Microsoft YaHei"/>
+                <a:cs typeface="Microsoft YaHei"/>
+              </a:rPr>
+              <a:t>阶段 04</a:t>
+            </a:r>
+          </a:p>
+        </p:txBody>
+      </p:sp>
+      <p:sp>
+        <p:nvSpPr>
+          <p:cNvPr id="26" name="">
+            <a:extLst xmlns:a="http://schemas.openxmlformats.org/drawingml/2006/main">
+              <a:ext uri="{FF2B5EF4-FFF2-40B4-BE49-F238E27FC236}">
+                <a16:creationId xmlns:a16="http://schemas.microsoft.com/office/drawing/2014/main" id="{426BC32F-50C6-4647-948D-6F2FDD8FBDEB}"/>
+              </a:ext>
+            </a:extLst>
+          </p:cNvPr>
+          <p:cNvSpPr>
+            <a:spLocks xmlns:a="http://schemas.openxmlformats.org/drawingml/2006/main" noGrp="1"/>
+          </p:cNvSpPr>
+          <p:nvPr/>
+        </p:nvSpPr>
+        <p:spPr>
+          <a:xfrm xmlns:a="http://schemas.openxmlformats.org/drawingml/2006/main">
+            <a:off x="10086975" y="3086100"/>
+            <a:ext cx="247650" cy="247650"/>
+          </a:xfrm>
+          <a:prstGeom xmlns:a="http://schemas.openxmlformats.org/drawingml/2006/main" prst="ellipse">
+            <a:avLst/>
+          </a:prstGeom>
+          <a:solidFill xmlns:a="http://schemas.openxmlformats.org/drawingml/2006/main">
+            <a:srgbClr val="14CBD1"/>
+          </a:solidFill>
+          <a:ln xmlns:a="http://schemas.openxmlformats.org/drawingml/2006/main" w="28575">
+            <a:solidFill>
+              <a:srgbClr val="FFFFFF"/>
+            </a:solidFill>
+            <a:prstDash val="solid"/>
+          </a:ln>
+        </p:spPr>
+        <p:style>
+          <a:lnRef xmlns:a="http://schemas.openxmlformats.org/drawingml/2006/main" idx="0"/>
+          <a:fillRef xmlns:a="http://schemas.openxmlformats.org/drawingml/2006/main" idx="0"/>
+          <a:effectRef xmlns:a="http://schemas.openxmlformats.org/drawingml/2006/main" idx="4"/>
+          <a:fontRef xmlns:a="http://schemas.openxmlformats.org/drawingml/2006/main" idx="major"/>
+        </p:style>
+      </p:sp>
+      <p:sp>
+        <p:nvSpPr>
+          <p:cNvPr id="27" name="">
+            <a:extLst xmlns:a="http://schemas.openxmlformats.org/drawingml/2006/main">
+              <a:ext uri="{FF2B5EF4-FFF2-40B4-BE49-F238E27FC236}">
+                <a16:creationId xmlns:a16="http://schemas.microsoft.com/office/drawing/2014/main" id="{D6C77F6C-C8BC-494E-8975-E646AED0B0F0}"/>
+              </a:ext>
+            </a:extLst>
+          </p:cNvPr>
+          <p:cNvSpPr>
+            <a:spLocks xmlns:a="http://schemas.openxmlformats.org/drawingml/2006/main" noGrp="1"/>
+          </p:cNvSpPr>
+          <p:nvPr/>
+        </p:nvSpPr>
+        <p:spPr>
+          <a:xfrm xmlns:a="http://schemas.openxmlformats.org/drawingml/2006/main">
+            <a:off x="8953500" y="3581400"/>
+            <a:ext cx="2514600" cy="552450"/>
+          </a:xfrm>
+          <a:prstGeom xmlns:a="http://schemas.openxmlformats.org/drawingml/2006/main" prst="rect">
+            <a:avLst/>
+          </a:prstGeom>
+          <a:noFill xmlns:a="http://schemas.openxmlformats.org/drawingml/2006/main"/>
+          <a:ln xmlns:a="http://schemas.openxmlformats.org/drawingml/2006/main" w="0">
+            <a:noFill/>
+            <a:prstDash val="solid"/>
+          </a:ln>
+        </p:spPr>
+        <p:txBody>
+          <a:bodyPr xmlns:a="http://schemas.openxmlformats.org/drawingml/2006/main" lIns="0" tIns="0" rIns="0" bIns="0" anchor="ctr">
+            <a:normAutofit fontScale="100000"/>
+          </a:bodyPr>
+          <a:lstStyle xmlns:a="http://schemas.openxmlformats.org/drawingml/2006/main"/>
+          <a:p xmlns:a="http://schemas.openxmlformats.org/drawingml/2006/main">
+            <a:pPr algn="ctr">
               <a:defRPr sz="1650" b="1">
                 <a:solidFill>
                   <a:srgbClr val="1677C8"/>
@@ -1694,17 +2454,17 @@
                 <a:ea typeface="Microsoft YaHei"/>
                 <a:cs typeface="Microsoft YaHei"/>
               </a:rPr>
-              <a:t>扩展</a:t>
+              <a:t>形成系统</a:t>
             </a:r>
           </a:p>
         </p:txBody>
       </p:sp>
       <p:sp>
         <p:nvSpPr>
-          <p:cNvPr id="15" name="">
+          <p:cNvPr id="28" name="">
             <a:extLst xmlns:a="http://schemas.openxmlformats.org/drawingml/2006/main">
               <a:ext uri="{FF2B5EF4-FFF2-40B4-BE49-F238E27FC236}">
-                <a16:creationId xmlns:a16="http://schemas.microsoft.com/office/drawing/2014/main" id="{5B6D320B-6FFE-417B-94ED-0C0E838B84E1}"/>
+                <a16:creationId xmlns:a16="http://schemas.microsoft.com/office/drawing/2014/main" id="{BA418F51-AE9F-49E1-AAE4-36D42F26D418}"/>
               </a:ext>
             </a:extLst>
           </p:cNvPr>
@@ -1715,8 +2475,8 @@
         </p:nvSpPr>
         <p:spPr>
           <a:xfrm xmlns:a="http://schemas.openxmlformats.org/drawingml/2006/main">
-            <a:off x="3390900" y="3267075"/>
-            <a:ext cx="1790700" cy="514350"/>
+            <a:off x="8991600" y="4210050"/>
+            <a:ext cx="2438400" cy="990600"/>
           </a:xfrm>
           <a:prstGeom xmlns:a="http://schemas.openxmlformats.org/drawingml/2006/main" prst="rect">
             <a:avLst/>
@@ -1733,7 +2493,7 @@
           </a:bodyPr>
           <a:lstStyle xmlns:a="http://schemas.openxmlformats.org/drawingml/2006/main"/>
           <a:p xmlns:a="http://schemas.openxmlformats.org/drawingml/2006/main">
-            <a:pPr algn="l">
+            <a:pPr algn="ctr">
               <a:defRPr sz="1200" b="0">
                 <a:solidFill>
                   <a:srgbClr val="475569"/>
@@ -1752,17 +2512,40 @@
                 <a:ea typeface="Microsoft YaHei"/>
                 <a:cs typeface="Microsoft YaHei"/>
               </a:rPr>
-              <a:t>说明本阶段的重要事项</a:t>
+              <a:t>让稿件、视觉规范与</a:t>
+            </a:r>
+          </a:p>
+          <a:p xmlns:a="http://schemas.openxmlformats.org/drawingml/2006/main">
+            <a:pPr algn="ctr">
+              <a:defRPr sz="1200" b="0">
+                <a:solidFill>
+                  <a:srgbClr val="475569"/>
+                </a:solidFill>
+                <a:latin typeface="Microsoft YaHei"/>
+                <a:ea typeface="Microsoft YaHei"/>
+                <a:cs typeface="Microsoft YaHei"/>
+              </a:defRPr>
+            </a:pPr>
+            <a:r>
+              <a:rPr sz="1200" b="0">
+                <a:solidFill>
+                  <a:srgbClr val="475569"/>
+                </a:solidFill>
+                <a:latin typeface="Microsoft YaHei"/>
+                <a:ea typeface="Microsoft YaHei"/>
+                <a:cs typeface="Microsoft YaHei"/>
+              </a:rPr>
+              <a:t>可靠交付形成完整链路</a:t>
             </a:r>
           </a:p>
         </p:txBody>
       </p:sp>
       <p:sp>
         <p:nvSpPr>
-          <p:cNvPr id="16" name="">
+          <p:cNvPr id="29" name="">
             <a:extLst xmlns:a="http://schemas.openxmlformats.org/drawingml/2006/main">
               <a:ext uri="{FF2B5EF4-FFF2-40B4-BE49-F238E27FC236}">
-                <a16:creationId xmlns:a16="http://schemas.microsoft.com/office/drawing/2014/main" id="{736665BC-7CB0-4A61-A380-78BF872F9AC9}"/>
+                <a16:creationId xmlns:a16="http://schemas.microsoft.com/office/drawing/2014/main" id="{7185B15A-5CD3-47AD-8393-6FEA7B45B3B6}"/>
               </a:ext>
             </a:extLst>
           </p:cNvPr>
@@ -1773,490 +2556,27 @@
         </p:nvSpPr>
         <p:spPr>
           <a:xfrm xmlns:a="http://schemas.openxmlformats.org/drawingml/2006/main">
-            <a:off x="7600950" y="3314700"/>
-            <a:ext cx="228600" cy="228600"/>
-          </a:xfrm>
-          <a:prstGeom xmlns:a="http://schemas.openxmlformats.org/drawingml/2006/main" prst="ellipse">
-            <a:avLst/>
-          </a:prstGeom>
-          <a:solidFill xmlns:a="http://schemas.openxmlformats.org/drawingml/2006/main">
-            <a:srgbClr val="1677C8"/>
-          </a:solidFill>
-          <a:ln xmlns:a="http://schemas.openxmlformats.org/drawingml/2006/main" w="28575">
-            <a:solidFill>
-              <a:srgbClr val="FFFFFF"/>
-            </a:solidFill>
-            <a:prstDash val="solid"/>
-          </a:ln>
-        </p:spPr>
-      </p:sp>
-      <p:sp>
-        <p:nvSpPr>
-          <p:cNvPr id="17" name="">
-            <a:extLst xmlns:a="http://schemas.openxmlformats.org/drawingml/2006/main">
-              <a:ext uri="{FF2B5EF4-FFF2-40B4-BE49-F238E27FC236}">
-                <a16:creationId xmlns:a16="http://schemas.microsoft.com/office/drawing/2014/main" id="{CB76F13D-6EF1-4E18-92B6-CDF41BA4010D}"/>
-              </a:ext>
-            </a:extLst>
-          </p:cNvPr>
-          <p:cNvSpPr>
-            <a:spLocks xmlns:a="http://schemas.openxmlformats.org/drawingml/2006/main" noGrp="1"/>
-          </p:cNvSpPr>
-          <p:nvPr/>
-        </p:nvSpPr>
-        <p:spPr>
-          <a:xfrm xmlns:a="http://schemas.openxmlformats.org/drawingml/2006/main">
-            <a:off x="6667500" y="1238250"/>
-            <a:ext cx="2095500" cy="1714500"/>
+            <a:off x="9982200" y="5391150"/>
+            <a:ext cx="457200" cy="47625"/>
           </a:xfrm>
           <a:prstGeom xmlns:a="http://schemas.openxmlformats.org/drawingml/2006/main" prst="roundRect">
             <a:avLst>
-              <a:gd name="adj" fmla="val 6667"/>
+              <a:gd name="adj" fmla="val 50000"/>
             </a:avLst>
           </a:prstGeom>
           <a:solidFill xmlns:a="http://schemas.openxmlformats.org/drawingml/2006/main">
-            <a:srgbClr val="FFFFFF"/>
-          </a:solidFill>
-          <a:ln xmlns:a="http://schemas.openxmlformats.org/drawingml/2006/main" w="9525">
-            <a:solidFill>
-              <a:srgbClr val="C9D5E3"/>
-            </a:solidFill>
-            <a:prstDash val="dash"/>
-          </a:ln>
-        </p:spPr>
-        <p:style>
-          <a:lnRef xmlns:a="http://schemas.openxmlformats.org/drawingml/2006/main" idx="0"/>
-          <a:fillRef xmlns:a="http://schemas.openxmlformats.org/drawingml/2006/main" idx="0"/>
-          <a:effectRef xmlns:a="http://schemas.openxmlformats.org/drawingml/2006/main" idx="4"/>
-          <a:fontRef xmlns:a="http://schemas.openxmlformats.org/drawingml/2006/main" idx="major"/>
-        </p:style>
-      </p:sp>
-      <p:sp>
-        <p:nvSpPr>
-          <p:cNvPr id="18" name="">
-            <a:extLst xmlns:a="http://schemas.openxmlformats.org/drawingml/2006/main">
-              <a:ext uri="{FF2B5EF4-FFF2-40B4-BE49-F238E27FC236}">
-                <a16:creationId xmlns:a16="http://schemas.microsoft.com/office/drawing/2014/main" id="{D53D5198-E9F1-47BF-9BEA-1FFBFDBDE096}"/>
-              </a:ext>
-            </a:extLst>
-          </p:cNvPr>
-          <p:cNvSpPr>
-            <a:spLocks xmlns:a="http://schemas.openxmlformats.org/drawingml/2006/main" noGrp="1"/>
-          </p:cNvSpPr>
-          <p:nvPr/>
-        </p:nvSpPr>
-        <p:spPr>
-          <a:xfrm xmlns:a="http://schemas.openxmlformats.org/drawingml/2006/main">
-            <a:off x="6819900" y="1409700"/>
-            <a:ext cx="1790700" cy="266700"/>
-          </a:xfrm>
-          <a:prstGeom xmlns:a="http://schemas.openxmlformats.org/drawingml/2006/main" prst="rect">
-            <a:avLst/>
-          </a:prstGeom>
-          <a:noFill xmlns:a="http://schemas.openxmlformats.org/drawingml/2006/main"/>
+            <a:srgbClr val="14CBD1"/>
+          </a:solidFill>
           <a:ln xmlns:a="http://schemas.openxmlformats.org/drawingml/2006/main" w="0">
             <a:noFill/>
             <a:prstDash val="solid"/>
           </a:ln>
         </p:spPr>
-        <p:txBody>
-          <a:bodyPr xmlns:a="http://schemas.openxmlformats.org/drawingml/2006/main" lIns="0" tIns="0" rIns="0" bIns="0" anchor="ctr">
-            <a:normAutofit fontScale="100000"/>
-          </a:bodyPr>
-          <a:lstStyle xmlns:a="http://schemas.openxmlformats.org/drawingml/2006/main"/>
-          <a:p xmlns:a="http://schemas.openxmlformats.org/drawingml/2006/main">
-            <a:pPr algn="l">
-              <a:defRPr sz="1200" b="0">
-                <a:solidFill>
-                  <a:srgbClr val="7C8A9A"/>
-                </a:solidFill>
-                <a:latin typeface="Microsoft YaHei"/>
-                <a:ea typeface="Microsoft YaHei"/>
-                <a:cs typeface="Microsoft YaHei"/>
-              </a:defRPr>
-            </a:pPr>
-            <a:r>
-              <a:rPr sz="1200" b="0">
-                <a:solidFill>
-                  <a:srgbClr val="7C8A9A"/>
-                </a:solidFill>
-                <a:latin typeface="Microsoft YaHei"/>
-                <a:ea typeface="Microsoft YaHei"/>
-                <a:cs typeface="Microsoft YaHei"/>
-              </a:rPr>
-              <a:t>阶段三</a:t>
-            </a:r>
-          </a:p>
-        </p:txBody>
-      </p:sp>
-      <p:sp>
-        <p:nvSpPr>
-          <p:cNvPr id="19" name="">
-            <a:extLst xmlns:a="http://schemas.openxmlformats.org/drawingml/2006/main">
-              <a:ext uri="{FF2B5EF4-FFF2-40B4-BE49-F238E27FC236}">
-                <a16:creationId xmlns:a16="http://schemas.microsoft.com/office/drawing/2014/main" id="{34FC677D-6786-4886-9FF6-E5EC3BA55B99}"/>
-              </a:ext>
-            </a:extLst>
-          </p:cNvPr>
-          <p:cNvSpPr>
-            <a:spLocks xmlns:a="http://schemas.openxmlformats.org/drawingml/2006/main" noGrp="1"/>
-          </p:cNvSpPr>
-          <p:nvPr/>
-        </p:nvSpPr>
-        <p:spPr>
-          <a:xfrm xmlns:a="http://schemas.openxmlformats.org/drawingml/2006/main">
-            <a:off x="6819900" y="1714500"/>
-            <a:ext cx="1790700" cy="495300"/>
-          </a:xfrm>
-          <a:prstGeom xmlns:a="http://schemas.openxmlformats.org/drawingml/2006/main" prst="rect">
-            <a:avLst/>
-          </a:prstGeom>
-          <a:noFill xmlns:a="http://schemas.openxmlformats.org/drawingml/2006/main"/>
-          <a:ln xmlns:a="http://schemas.openxmlformats.org/drawingml/2006/main" w="0">
-            <a:noFill/>
-            <a:prstDash val="solid"/>
-          </a:ln>
-        </p:spPr>
-        <p:txBody>
-          <a:bodyPr xmlns:a="http://schemas.openxmlformats.org/drawingml/2006/main" lIns="0" tIns="0" rIns="0" bIns="0" anchor="ctr">
-            <a:normAutofit fontScale="100000"/>
-          </a:bodyPr>
-          <a:lstStyle xmlns:a="http://schemas.openxmlformats.org/drawingml/2006/main"/>
-          <a:p xmlns:a="http://schemas.openxmlformats.org/drawingml/2006/main">
-            <a:pPr algn="l">
-              <a:defRPr sz="1650" b="1">
-                <a:solidFill>
-                  <a:srgbClr val="1677C8"/>
-                </a:solidFill>
-                <a:latin typeface="Microsoft YaHei"/>
-                <a:ea typeface="Microsoft YaHei"/>
-                <a:cs typeface="Microsoft YaHei"/>
-              </a:defRPr>
-            </a:pPr>
-            <a:r>
-              <a:rPr sz="1650" b="1">
-                <a:solidFill>
-                  <a:srgbClr val="1677C8"/>
-                </a:solidFill>
-                <a:latin typeface="Microsoft YaHei"/>
-                <a:ea typeface="Microsoft YaHei"/>
-                <a:cs typeface="Microsoft YaHei"/>
-              </a:rPr>
-              <a:t>成熟</a:t>
-            </a:r>
-          </a:p>
-        </p:txBody>
-      </p:sp>
-      <p:sp>
-        <p:nvSpPr>
-          <p:cNvPr id="20" name="">
-            <a:extLst xmlns:a="http://schemas.openxmlformats.org/drawingml/2006/main">
-              <a:ext uri="{FF2B5EF4-FFF2-40B4-BE49-F238E27FC236}">
-                <a16:creationId xmlns:a16="http://schemas.microsoft.com/office/drawing/2014/main" id="{9895CF2C-E40B-437D-B00C-9548D85B0CF5}"/>
-              </a:ext>
-            </a:extLst>
-          </p:cNvPr>
-          <p:cNvSpPr>
-            <a:spLocks xmlns:a="http://schemas.openxmlformats.org/drawingml/2006/main" noGrp="1"/>
-          </p:cNvSpPr>
-          <p:nvPr/>
-        </p:nvSpPr>
-        <p:spPr>
-          <a:xfrm xmlns:a="http://schemas.openxmlformats.org/drawingml/2006/main">
-            <a:off x="6819900" y="2266950"/>
-            <a:ext cx="1790700" cy="514350"/>
-          </a:xfrm>
-          <a:prstGeom xmlns:a="http://schemas.openxmlformats.org/drawingml/2006/main" prst="rect">
-            <a:avLst/>
-          </a:prstGeom>
-          <a:noFill xmlns:a="http://schemas.openxmlformats.org/drawingml/2006/main"/>
-          <a:ln xmlns:a="http://schemas.openxmlformats.org/drawingml/2006/main" w="0">
-            <a:noFill/>
-            <a:prstDash val="solid"/>
-          </a:ln>
-        </p:spPr>
-        <p:txBody>
-          <a:bodyPr xmlns:a="http://schemas.openxmlformats.org/drawingml/2006/main" lIns="0" tIns="0" rIns="0" bIns="0" anchor="t">
-            <a:normAutofit fontScale="100000"/>
-          </a:bodyPr>
-          <a:lstStyle xmlns:a="http://schemas.openxmlformats.org/drawingml/2006/main"/>
-          <a:p xmlns:a="http://schemas.openxmlformats.org/drawingml/2006/main">
-            <a:pPr algn="l">
-              <a:defRPr sz="1200" b="0">
-                <a:solidFill>
-                  <a:srgbClr val="475569"/>
-                </a:solidFill>
-                <a:latin typeface="Microsoft YaHei"/>
-                <a:ea typeface="Microsoft YaHei"/>
-                <a:cs typeface="Microsoft YaHei"/>
-              </a:defRPr>
-            </a:pPr>
-            <a:r>
-              <a:rPr sz="1200" b="0">
-                <a:solidFill>
-                  <a:srgbClr val="475569"/>
-                </a:solidFill>
-                <a:latin typeface="Microsoft YaHei"/>
-                <a:ea typeface="Microsoft YaHei"/>
-                <a:cs typeface="Microsoft YaHei"/>
-              </a:rPr>
-              <a:t>说明本阶段的重要事项</a:t>
-            </a:r>
-          </a:p>
-        </p:txBody>
-      </p:sp>
-      <p:sp>
-        <p:nvSpPr>
-          <p:cNvPr id="21" name="">
-            <a:extLst xmlns:a="http://schemas.openxmlformats.org/drawingml/2006/main">
-              <a:ext uri="{FF2B5EF4-FFF2-40B4-BE49-F238E27FC236}">
-                <a16:creationId xmlns:a16="http://schemas.microsoft.com/office/drawing/2014/main" id="{83804838-E5F1-4799-AF62-805C4C671459}"/>
-              </a:ext>
-            </a:extLst>
-          </p:cNvPr>
-          <p:cNvSpPr>
-            <a:spLocks xmlns:a="http://schemas.openxmlformats.org/drawingml/2006/main" noGrp="1"/>
-          </p:cNvSpPr>
-          <p:nvPr/>
-        </p:nvSpPr>
-        <p:spPr>
-          <a:xfrm xmlns:a="http://schemas.openxmlformats.org/drawingml/2006/main">
-            <a:off x="11029950" y="2314575"/>
-            <a:ext cx="228600" cy="228600"/>
-          </a:xfrm>
-          <a:prstGeom xmlns:a="http://schemas.openxmlformats.org/drawingml/2006/main" prst="ellipse">
-            <a:avLst/>
-          </a:prstGeom>
-          <a:solidFill xmlns:a="http://schemas.openxmlformats.org/drawingml/2006/main">
-            <a:srgbClr val="00A8D8"/>
-          </a:solidFill>
-          <a:ln xmlns:a="http://schemas.openxmlformats.org/drawingml/2006/main" w="28575">
-            <a:solidFill>
-              <a:srgbClr val="FFFFFF"/>
-            </a:solidFill>
-            <a:prstDash val="solid"/>
-          </a:ln>
-        </p:spPr>
-      </p:sp>
-      <p:sp>
-        <p:nvSpPr>
-          <p:cNvPr id="22" name="">
-            <a:extLst xmlns:a="http://schemas.openxmlformats.org/drawingml/2006/main">
-              <a:ext uri="{FF2B5EF4-FFF2-40B4-BE49-F238E27FC236}">
-                <a16:creationId xmlns:a16="http://schemas.microsoft.com/office/drawing/2014/main" id="{4D84C8A3-5EC2-44BB-8E7C-63A7EAC2C56B}"/>
-              </a:ext>
-            </a:extLst>
-          </p:cNvPr>
-          <p:cNvSpPr>
-            <a:spLocks xmlns:a="http://schemas.openxmlformats.org/drawingml/2006/main" noGrp="1"/>
-          </p:cNvSpPr>
-          <p:nvPr/>
-        </p:nvSpPr>
-        <p:spPr>
-          <a:xfrm xmlns:a="http://schemas.openxmlformats.org/drawingml/2006/main">
-            <a:off x="9525000" y="238125"/>
-            <a:ext cx="2095500" cy="1714500"/>
-          </a:xfrm>
-          <a:prstGeom xmlns:a="http://schemas.openxmlformats.org/drawingml/2006/main" prst="roundRect">
-            <a:avLst>
-              <a:gd name="adj" fmla="val 6667"/>
-            </a:avLst>
-          </a:prstGeom>
-          <a:solidFill xmlns:a="http://schemas.openxmlformats.org/drawingml/2006/main">
-            <a:srgbClr val="FFFFFF"/>
-          </a:solidFill>
-          <a:ln xmlns:a="http://schemas.openxmlformats.org/drawingml/2006/main" w="9525">
-            <a:solidFill>
-              <a:srgbClr val="C9D5E3"/>
-            </a:solidFill>
-            <a:prstDash val="dash"/>
-          </a:ln>
-        </p:spPr>
-        <p:style>
-          <a:lnRef xmlns:a="http://schemas.openxmlformats.org/drawingml/2006/main" idx="0"/>
-          <a:fillRef xmlns:a="http://schemas.openxmlformats.org/drawingml/2006/main" idx="0"/>
-          <a:effectRef xmlns:a="http://schemas.openxmlformats.org/drawingml/2006/main" idx="4"/>
-          <a:fontRef xmlns:a="http://schemas.openxmlformats.org/drawingml/2006/main" idx="major"/>
-        </p:style>
-      </p:sp>
-      <p:sp>
-        <p:nvSpPr>
-          <p:cNvPr id="23" name="">
-            <a:extLst xmlns:a="http://schemas.openxmlformats.org/drawingml/2006/main">
-              <a:ext uri="{FF2B5EF4-FFF2-40B4-BE49-F238E27FC236}">
-                <a16:creationId xmlns:a16="http://schemas.microsoft.com/office/drawing/2014/main" id="{348EB0E0-2D57-462F-9760-7CEF6898D383}"/>
-              </a:ext>
-            </a:extLst>
-          </p:cNvPr>
-          <p:cNvSpPr>
-            <a:spLocks xmlns:a="http://schemas.openxmlformats.org/drawingml/2006/main" noGrp="1"/>
-          </p:cNvSpPr>
-          <p:nvPr/>
-        </p:nvSpPr>
-        <p:spPr>
-          <a:xfrm xmlns:a="http://schemas.openxmlformats.org/drawingml/2006/main">
-            <a:off x="9677400" y="409575"/>
-            <a:ext cx="1790700" cy="266700"/>
-          </a:xfrm>
-          <a:prstGeom xmlns:a="http://schemas.openxmlformats.org/drawingml/2006/main" prst="rect">
-            <a:avLst/>
-          </a:prstGeom>
-          <a:noFill xmlns:a="http://schemas.openxmlformats.org/drawingml/2006/main"/>
-          <a:ln xmlns:a="http://schemas.openxmlformats.org/drawingml/2006/main" w="0">
-            <a:noFill/>
-            <a:prstDash val="solid"/>
-          </a:ln>
-        </p:spPr>
-        <p:txBody>
-          <a:bodyPr xmlns:a="http://schemas.openxmlformats.org/drawingml/2006/main" lIns="0" tIns="0" rIns="0" bIns="0" anchor="ctr">
-            <a:normAutofit fontScale="100000"/>
-          </a:bodyPr>
-          <a:lstStyle xmlns:a="http://schemas.openxmlformats.org/drawingml/2006/main"/>
-          <a:p xmlns:a="http://schemas.openxmlformats.org/drawingml/2006/main">
-            <a:pPr algn="l">
-              <a:defRPr sz="1200" b="0">
-                <a:solidFill>
-                  <a:srgbClr val="7C8A9A"/>
-                </a:solidFill>
-                <a:latin typeface="Microsoft YaHei"/>
-                <a:ea typeface="Microsoft YaHei"/>
-                <a:cs typeface="Microsoft YaHei"/>
-              </a:defRPr>
-            </a:pPr>
-            <a:r>
-              <a:rPr sz="1200" b="0">
-                <a:solidFill>
-                  <a:srgbClr val="7C8A9A"/>
-                </a:solidFill>
-                <a:latin typeface="Microsoft YaHei"/>
-                <a:ea typeface="Microsoft YaHei"/>
-                <a:cs typeface="Microsoft YaHei"/>
-              </a:rPr>
-              <a:t>阶段四</a:t>
-            </a:r>
-          </a:p>
-        </p:txBody>
-      </p:sp>
-      <p:sp>
-        <p:nvSpPr>
-          <p:cNvPr id="24" name="">
-            <a:extLst xmlns:a="http://schemas.openxmlformats.org/drawingml/2006/main">
-              <a:ext uri="{FF2B5EF4-FFF2-40B4-BE49-F238E27FC236}">
-                <a16:creationId xmlns:a16="http://schemas.microsoft.com/office/drawing/2014/main" id="{545B06C1-3735-4B94-BA90-129EBEFF8953}"/>
-              </a:ext>
-            </a:extLst>
-          </p:cNvPr>
-          <p:cNvSpPr>
-            <a:spLocks xmlns:a="http://schemas.openxmlformats.org/drawingml/2006/main" noGrp="1"/>
-          </p:cNvSpPr>
-          <p:nvPr/>
-        </p:nvSpPr>
-        <p:spPr>
-          <a:xfrm xmlns:a="http://schemas.openxmlformats.org/drawingml/2006/main">
-            <a:off x="9677400" y="714375"/>
-            <a:ext cx="1790700" cy="495300"/>
-          </a:xfrm>
-          <a:prstGeom xmlns:a="http://schemas.openxmlformats.org/drawingml/2006/main" prst="rect">
-            <a:avLst/>
-          </a:prstGeom>
-          <a:noFill xmlns:a="http://schemas.openxmlformats.org/drawingml/2006/main"/>
-          <a:ln xmlns:a="http://schemas.openxmlformats.org/drawingml/2006/main" w="0">
-            <a:noFill/>
-            <a:prstDash val="solid"/>
-          </a:ln>
-        </p:spPr>
-        <p:txBody>
-          <a:bodyPr xmlns:a="http://schemas.openxmlformats.org/drawingml/2006/main" lIns="0" tIns="0" rIns="0" bIns="0" anchor="ctr">
-            <a:normAutofit fontScale="100000"/>
-          </a:bodyPr>
-          <a:lstStyle xmlns:a="http://schemas.openxmlformats.org/drawingml/2006/main"/>
-          <a:p xmlns:a="http://schemas.openxmlformats.org/drawingml/2006/main">
-            <a:pPr algn="l">
-              <a:defRPr sz="1650" b="1">
-                <a:solidFill>
-                  <a:srgbClr val="1677C8"/>
-                </a:solidFill>
-                <a:latin typeface="Microsoft YaHei"/>
-                <a:ea typeface="Microsoft YaHei"/>
-                <a:cs typeface="Microsoft YaHei"/>
-              </a:defRPr>
-            </a:pPr>
-            <a:r>
-              <a:rPr sz="1650" b="1">
-                <a:solidFill>
-                  <a:srgbClr val="1677C8"/>
-                </a:solidFill>
-                <a:latin typeface="Microsoft YaHei"/>
-                <a:ea typeface="Microsoft YaHei"/>
-                <a:cs typeface="Microsoft YaHei"/>
-              </a:rPr>
-              <a:t>升级</a:t>
-            </a:r>
-          </a:p>
-        </p:txBody>
-      </p:sp>
-      <p:sp>
-        <p:nvSpPr>
-          <p:cNvPr id="25" name="">
-            <a:extLst xmlns:a="http://schemas.openxmlformats.org/drawingml/2006/main">
-              <a:ext uri="{FF2B5EF4-FFF2-40B4-BE49-F238E27FC236}">
-                <a16:creationId xmlns:a16="http://schemas.microsoft.com/office/drawing/2014/main" id="{320E8BCA-6E7F-498E-84DB-8C57921B4AD7}"/>
-              </a:ext>
-            </a:extLst>
-          </p:cNvPr>
-          <p:cNvSpPr>
-            <a:spLocks xmlns:a="http://schemas.openxmlformats.org/drawingml/2006/main" noGrp="1"/>
-          </p:cNvSpPr>
-          <p:nvPr/>
-        </p:nvSpPr>
-        <p:spPr>
-          <a:xfrm xmlns:a="http://schemas.openxmlformats.org/drawingml/2006/main">
-            <a:off x="9677400" y="1266825"/>
-            <a:ext cx="1790700" cy="514350"/>
-          </a:xfrm>
-          <a:prstGeom xmlns:a="http://schemas.openxmlformats.org/drawingml/2006/main" prst="rect">
-            <a:avLst/>
-          </a:prstGeom>
-          <a:noFill xmlns:a="http://schemas.openxmlformats.org/drawingml/2006/main"/>
-          <a:ln xmlns:a="http://schemas.openxmlformats.org/drawingml/2006/main" w="0">
-            <a:noFill/>
-            <a:prstDash val="solid"/>
-          </a:ln>
-        </p:spPr>
-        <p:txBody>
-          <a:bodyPr xmlns:a="http://schemas.openxmlformats.org/drawingml/2006/main" lIns="0" tIns="0" rIns="0" bIns="0" anchor="t">
-            <a:normAutofit fontScale="100000"/>
-          </a:bodyPr>
-          <a:lstStyle xmlns:a="http://schemas.openxmlformats.org/drawingml/2006/main"/>
-          <a:p xmlns:a="http://schemas.openxmlformats.org/drawingml/2006/main">
-            <a:pPr algn="l">
-              <a:defRPr sz="1200" b="0">
-                <a:solidFill>
-                  <a:srgbClr val="475569"/>
-                </a:solidFill>
-                <a:latin typeface="Microsoft YaHei"/>
-                <a:ea typeface="Microsoft YaHei"/>
-                <a:cs typeface="Microsoft YaHei"/>
-              </a:defRPr>
-            </a:pPr>
-            <a:r>
-              <a:rPr sz="1200" b="0">
-                <a:solidFill>
-                  <a:srgbClr val="475569"/>
-                </a:solidFill>
-                <a:latin typeface="Microsoft YaHei"/>
-                <a:ea typeface="Microsoft YaHei"/>
-                <a:cs typeface="Microsoft YaHei"/>
-              </a:rPr>
-              <a:t>说明本阶段的重要事项</a:t>
-            </a:r>
-          </a:p>
-        </p:txBody>
       </p:sp>
     </p:spTree>
     <p:extLst>
       <p:ext uri="{BB962C8B-B14F-4D97-AF65-F5344CB8AC3E}">
-        <p14:creationId xmlns:p14="http://schemas.microsoft.com/office/powerpoint/2010/main" val="2130092066"/>
+        <p14:creationId xmlns:p14="http://schemas.microsoft.com/office/powerpoint/2010/main" val="1365851430"/>
       </p:ext>
     </p:extLst>
   </p:cSld>
